--- a/aulas/aula-07-verificacao.pptx
+++ b/aulas/aula-07-verificacao.pptx
@@ -6,14 +6,15 @@
   </p:sldMasterIdLst>
   <p:sldIdLst>
     <p:sldId id="256" r:id="rId7"/>
-    <p:sldId id="257" r:id="rId8"/>
-    <p:sldId id="258" r:id="rId9"/>
-    <p:sldId id="259" r:id="rId10"/>
-    <p:sldId id="260" r:id="rId11"/>
-    <p:sldId id="261" r:id="rId12"/>
-    <p:sldId id="262" r:id="rId13"/>
-    <p:sldId id="263" r:id="rId14"/>
-    <p:sldId id="264" r:id="rId15"/>
+    <p:sldId id="257" r:id="rId9"/>
+    <p:sldId id="258" r:id="rId10"/>
+    <p:sldId id="259" r:id="rId11"/>
+    <p:sldId id="260" r:id="rId12"/>
+    <p:sldId id="261" r:id="rId13"/>
+    <p:sldId id="262" r:id="rId14"/>
+    <p:sldId id="263" r:id="rId15"/>
+    <p:sldId id="264" r:id="rId16"/>
+    <p:sldId id="265" r:id="rId17"/>
   </p:sldIdLst>
   <p:sldSz cx="12191695" cy="6858000" type="screen4x3"/>
   <p:notesSz cx="6858000" cy="9144000"/>
@@ -113,6 +114,776 @@
     </a:lvl9pPr>
   </p:defaultTextStyle>
 </p:presentation>
+</file>
+
+<file path=ppt/notesMasters/notesMaster1.xml><?xml version="1.0" encoding="utf-8"?>
+<p:notesMaster xmlns:a="http://schemas.openxmlformats.org/drawingml/2006/main" xmlns:p="http://schemas.openxmlformats.org/presentationml/2006/main" xmlns:r="http://schemas.openxmlformats.org/officeDocument/2006/relationships">
+  <p:cSld>
+    <p:bg>
+      <p:bgRef idx="1001">
+        <a:schemeClr val="bg1"/>
+      </p:bgRef>
+    </p:bg>
+    <p:spTree>
+      <p:nvGrpSpPr>
+        <p:cNvPr id="1" name=""/>
+        <p:cNvGrpSpPr/>
+        <p:nvPr/>
+      </p:nvGrpSpPr>
+      <p:grpSpPr>
+        <a:xfrm>
+          <a:off x="0" y="0"/>
+          <a:ext cx="0" cy="0"/>
+          <a:chOff x="0" y="0"/>
+          <a:chExt cx="0" cy="0"/>
+        </a:xfrm>
+      </p:grpSpPr>
+      <p:sp>
+        <p:nvSpPr>
+          <p:cNvPr id="2" name="Header Placeholder 1"/>
+          <p:cNvSpPr>
+            <a:spLocks noGrp="1"/>
+          </p:cNvSpPr>
+          <p:nvPr>
+            <p:ph type="hdr" sz="quarter"/>
+          </p:nvPr>
+        </p:nvSpPr>
+        <p:spPr>
+          <a:xfrm>
+            <a:off x="0" y="0"/>
+            <a:ext cx="2971800" cy="457200"/>
+          </a:xfrm>
+          <a:prstGeom prst="rect">
+            <a:avLst/>
+          </a:prstGeom>
+        </p:spPr>
+        <p:txBody>
+          <a:bodyPr vert="horz" lIns="91440" tIns="45720" rIns="91440" bIns="45720" rtlCol="0"/>
+          <a:lstStyle>
+            <a:lvl1pPr algn="l">
+              <a:defRPr sz="1200"/>
+            </a:lvl1pPr>
+          </a:lstStyle>
+          <a:p>
+            <a:endParaRPr lang="en-US"/>
+          </a:p>
+        </p:txBody>
+      </p:sp>
+      <p:sp>
+        <p:nvSpPr>
+          <p:cNvPr id="3" name="Date Placeholder 2"/>
+          <p:cNvSpPr>
+            <a:spLocks noGrp="1"/>
+          </p:cNvSpPr>
+          <p:nvPr>
+            <p:ph type="dt" idx="1"/>
+          </p:nvPr>
+        </p:nvSpPr>
+        <p:spPr>
+          <a:xfrm>
+            <a:off x="3884613" y="0"/>
+            <a:ext cx="2971800" cy="457200"/>
+          </a:xfrm>
+          <a:prstGeom prst="rect">
+            <a:avLst/>
+          </a:prstGeom>
+        </p:spPr>
+        <p:txBody>
+          <a:bodyPr vert="horz" lIns="91440" tIns="45720" rIns="91440" bIns="45720" rtlCol="0"/>
+          <a:lstStyle>
+            <a:lvl1pPr algn="r">
+              <a:defRPr sz="1200"/>
+            </a:lvl1pPr>
+          </a:lstStyle>
+          <a:p>
+            <a:fld id="{0F89C1C7-3DCD-1040-A9CF-14679D8B5DDD}" type="datetimeFigureOut">
+              <a:rPr lang="en-US" smtClean="0"/>
+              <a:t>10/17/16</a:t>
+            </a:fld>
+            <a:endParaRPr lang="en-US"/>
+          </a:p>
+        </p:txBody>
+      </p:sp>
+      <p:sp>
+        <p:nvSpPr>
+          <p:cNvPr id="4" name="Slide Image Placeholder 3"/>
+          <p:cNvSpPr>
+            <a:spLocks noGrp="1" noRot="1" noChangeAspect="1"/>
+          </p:cNvSpPr>
+          <p:nvPr>
+            <p:ph type="sldImg" idx="2"/>
+          </p:nvPr>
+        </p:nvSpPr>
+        <p:spPr>
+          <a:xfrm>
+            <a:off x="1143000" y="685800"/>
+            <a:ext cx="4572000" cy="3429000"/>
+          </a:xfrm>
+          <a:prstGeom prst="rect">
+            <a:avLst/>
+          </a:prstGeom>
+          <a:noFill/>
+          <a:ln w="12700">
+            <a:solidFill>
+              <a:prstClr val="black"/>
+            </a:solidFill>
+          </a:ln>
+        </p:spPr>
+        <p:txBody>
+          <a:bodyPr vert="horz" lIns="91440" tIns="45720" rIns="91440" bIns="45720" rtlCol="0" anchor="ctr"/>
+          <a:lstStyle/>
+          <a:p>
+            <a:endParaRPr lang="en-US"/>
+          </a:p>
+        </p:txBody>
+      </p:sp>
+      <p:sp>
+        <p:nvSpPr>
+          <p:cNvPr id="5" name="Notes Placeholder 4"/>
+          <p:cNvSpPr>
+            <a:spLocks noGrp="1"/>
+          </p:cNvSpPr>
+          <p:nvPr>
+            <p:ph type="body" sz="quarter" idx="3"/>
+          </p:nvPr>
+        </p:nvSpPr>
+        <p:spPr>
+          <a:xfrm>
+            <a:off x="685800" y="4343400"/>
+            <a:ext cx="5486400" cy="4114800"/>
+          </a:xfrm>
+          <a:prstGeom prst="rect">
+            <a:avLst/>
+          </a:prstGeom>
+        </p:spPr>
+        <p:txBody>
+          <a:bodyPr vert="horz" lIns="91440" tIns="45720" rIns="91440" bIns="45720" rtlCol="0"/>
+          <a:lstStyle/>
+          <a:p>
+            <a:pPr lvl="0"/>
+            <a:r>
+              <a:rPr lang="en-US" smtClean="0"/>
+              <a:t>Click to edit Master text styles</a:t>
+            </a:r>
+          </a:p>
+          <a:p>
+            <a:pPr lvl="1"/>
+            <a:r>
+              <a:rPr lang="en-US" smtClean="0"/>
+              <a:t>Second level</a:t>
+            </a:r>
+          </a:p>
+          <a:p>
+            <a:pPr lvl="2"/>
+            <a:r>
+              <a:rPr lang="en-US" smtClean="0"/>
+              <a:t>Third level</a:t>
+            </a:r>
+          </a:p>
+          <a:p>
+            <a:pPr lvl="3"/>
+            <a:r>
+              <a:rPr lang="en-US" smtClean="0"/>
+              <a:t>Fourth level</a:t>
+            </a:r>
+          </a:p>
+          <a:p>
+            <a:pPr lvl="4"/>
+            <a:r>
+              <a:rPr lang="en-US" smtClean="0"/>
+              <a:t>Fifth level</a:t>
+            </a:r>
+            <a:endParaRPr lang="en-US"/>
+          </a:p>
+        </p:txBody>
+      </p:sp>
+      <p:sp>
+        <p:nvSpPr>
+          <p:cNvPr id="6" name="Footer Placeholder 5"/>
+          <p:cNvSpPr>
+            <a:spLocks noGrp="1"/>
+          </p:cNvSpPr>
+          <p:nvPr>
+            <p:ph type="ftr" sz="quarter" idx="4"/>
+          </p:nvPr>
+        </p:nvSpPr>
+        <p:spPr>
+          <a:xfrm>
+            <a:off x="0" y="8685213"/>
+            <a:ext cx="2971800" cy="457200"/>
+          </a:xfrm>
+          <a:prstGeom prst="rect">
+            <a:avLst/>
+          </a:prstGeom>
+        </p:spPr>
+        <p:txBody>
+          <a:bodyPr vert="horz" lIns="91440" tIns="45720" rIns="91440" bIns="45720" rtlCol="0" anchor="b"/>
+          <a:lstStyle>
+            <a:lvl1pPr algn="l">
+              <a:defRPr sz="1200"/>
+            </a:lvl1pPr>
+          </a:lstStyle>
+          <a:p>
+            <a:endParaRPr lang="en-US"/>
+          </a:p>
+        </p:txBody>
+      </p:sp>
+      <p:sp>
+        <p:nvSpPr>
+          <p:cNvPr id="7" name="Slide Number Placeholder 6"/>
+          <p:cNvSpPr>
+            <a:spLocks noGrp="1"/>
+          </p:cNvSpPr>
+          <p:nvPr>
+            <p:ph type="sldNum" sz="quarter" idx="5"/>
+          </p:nvPr>
+        </p:nvSpPr>
+        <p:spPr>
+          <a:xfrm>
+            <a:off x="3884613" y="8685213"/>
+            <a:ext cx="2971800" cy="457200"/>
+          </a:xfrm>
+          <a:prstGeom prst="rect">
+            <a:avLst/>
+          </a:prstGeom>
+        </p:spPr>
+        <p:txBody>
+          <a:bodyPr vert="horz" lIns="91440" tIns="45720" rIns="91440" bIns="45720" rtlCol="0" anchor="b"/>
+          <a:lstStyle>
+            <a:lvl1pPr algn="r">
+              <a:defRPr sz="1200"/>
+            </a:lvl1pPr>
+          </a:lstStyle>
+          <a:p>
+            <a:fld id="{BB5E49A5-4136-284D-997B-48E1D791AD67}" type="slidenum">
+              <a:rPr lang="en-US" smtClean="0"/>
+              <a:t>‹#›</a:t>
+            </a:fld>
+            <a:endParaRPr lang="en-US"/>
+          </a:p>
+        </p:txBody>
+      </p:sp>
+    </p:spTree>
+    <p:extLst>
+      <p:ext uri="{BB962C8B-B14F-4D97-AF65-F5344CB8AC3E}">
+        <p14:creationId xmlns:p14="http://schemas.microsoft.com/office/powerpoint/2010/main" val="2623252185"/>
+      </p:ext>
+    </p:extLst>
+  </p:cSld>
+  <p:clrMap bg1="lt1" tx1="dk1" bg2="lt2" tx2="dk2" accent1="accent1" accent2="accent2" accent3="accent3" accent4="accent4" accent5="accent5" accent6="accent6" hlink="hlink" folHlink="folHlink"/>
+  <p:notesStyle>
+    <a:lvl1pPr marL="0" algn="l" defTabSz="457200" rtl="0" eaLnBrk="1" latinLnBrk="0" hangingPunct="1">
+      <a:defRPr sz="1200" kern="1200">
+        <a:solidFill>
+          <a:schemeClr val="tx1"/>
+        </a:solidFill>
+        <a:latin typeface="+mn-lt"/>
+        <a:ea typeface="+mn-ea"/>
+        <a:cs typeface="+mn-cs"/>
+      </a:defRPr>
+    </a:lvl1pPr>
+    <a:lvl2pPr marL="457200" algn="l" defTabSz="457200" rtl="0" eaLnBrk="1" latinLnBrk="0" hangingPunct="1">
+      <a:defRPr sz="1200" kern="1200">
+        <a:solidFill>
+          <a:schemeClr val="tx1"/>
+        </a:solidFill>
+        <a:latin typeface="+mn-lt"/>
+        <a:ea typeface="+mn-ea"/>
+        <a:cs typeface="+mn-cs"/>
+      </a:defRPr>
+    </a:lvl2pPr>
+    <a:lvl3pPr marL="914400" algn="l" defTabSz="457200" rtl="0" eaLnBrk="1" latinLnBrk="0" hangingPunct="1">
+      <a:defRPr sz="1200" kern="1200">
+        <a:solidFill>
+          <a:schemeClr val="tx1"/>
+        </a:solidFill>
+        <a:latin typeface="+mn-lt"/>
+        <a:ea typeface="+mn-ea"/>
+        <a:cs typeface="+mn-cs"/>
+      </a:defRPr>
+    </a:lvl3pPr>
+    <a:lvl4pPr marL="1371600" algn="l" defTabSz="457200" rtl="0" eaLnBrk="1" latinLnBrk="0" hangingPunct="1">
+      <a:defRPr sz="1200" kern="1200">
+        <a:solidFill>
+          <a:schemeClr val="tx1"/>
+        </a:solidFill>
+        <a:latin typeface="+mn-lt"/>
+        <a:ea typeface="+mn-ea"/>
+        <a:cs typeface="+mn-cs"/>
+      </a:defRPr>
+    </a:lvl4pPr>
+    <a:lvl5pPr marL="1828800" algn="l" defTabSz="457200" rtl="0" eaLnBrk="1" latinLnBrk="0" hangingPunct="1">
+      <a:defRPr sz="1200" kern="1200">
+        <a:solidFill>
+          <a:schemeClr val="tx1"/>
+        </a:solidFill>
+        <a:latin typeface="+mn-lt"/>
+        <a:ea typeface="+mn-ea"/>
+        <a:cs typeface="+mn-cs"/>
+      </a:defRPr>
+    </a:lvl5pPr>
+    <a:lvl6pPr marL="2286000" algn="l" defTabSz="457200" rtl="0" eaLnBrk="1" latinLnBrk="0" hangingPunct="1">
+      <a:defRPr sz="1200" kern="1200">
+        <a:solidFill>
+          <a:schemeClr val="tx1"/>
+        </a:solidFill>
+        <a:latin typeface="+mn-lt"/>
+        <a:ea typeface="+mn-ea"/>
+        <a:cs typeface="+mn-cs"/>
+      </a:defRPr>
+    </a:lvl6pPr>
+    <a:lvl7pPr marL="2743200" algn="l" defTabSz="457200" rtl="0" eaLnBrk="1" latinLnBrk="0" hangingPunct="1">
+      <a:defRPr sz="1200" kern="1200">
+        <a:solidFill>
+          <a:schemeClr val="tx1"/>
+        </a:solidFill>
+        <a:latin typeface="+mn-lt"/>
+        <a:ea typeface="+mn-ea"/>
+        <a:cs typeface="+mn-cs"/>
+      </a:defRPr>
+    </a:lvl7pPr>
+    <a:lvl8pPr marL="3200400" algn="l" defTabSz="457200" rtl="0" eaLnBrk="1" latinLnBrk="0" hangingPunct="1">
+      <a:defRPr sz="1200" kern="1200">
+        <a:solidFill>
+          <a:schemeClr val="tx1"/>
+        </a:solidFill>
+        <a:latin typeface="+mn-lt"/>
+        <a:ea typeface="+mn-ea"/>
+        <a:cs typeface="+mn-cs"/>
+      </a:defRPr>
+    </a:lvl8pPr>
+    <a:lvl9pPr marL="3657600" algn="l" defTabSz="457200" rtl="0" eaLnBrk="1" latinLnBrk="0" hangingPunct="1">
+      <a:defRPr sz="1200" kern="1200">
+        <a:solidFill>
+          <a:schemeClr val="tx1"/>
+        </a:solidFill>
+        <a:latin typeface="+mn-lt"/>
+        <a:ea typeface="+mn-ea"/>
+        <a:cs typeface="+mn-cs"/>
+      </a:defRPr>
+    </a:lvl9pPr>
+  </p:notesStyle>
+</p:notesMaster>
+</file>
+
+<file path=ppt/notesSlides/notesSlide1.xml><?xml version="1.0" encoding="utf-8"?>
+<p:notes xmlns:a="http://schemas.openxmlformats.org/drawingml/2006/main" xmlns:p="http://schemas.openxmlformats.org/presentationml/2006/main" xmlns:r="http://schemas.openxmlformats.org/officeDocument/2006/relationships">
+  <p:cSld>
+    <p:spTree>
+      <p:nvGrpSpPr>
+        <p:cNvPr id="1" name=""/>
+        <p:cNvGrpSpPr/>
+        <p:nvPr/>
+      </p:nvGrpSpPr>
+      <p:grpSpPr>
+        <a:xfrm>
+          <a:off x="0" y="0"/>
+          <a:ext cx="0" cy="0"/>
+          <a:chOff x="0" y="0"/>
+          <a:chExt cx="0" cy="0"/>
+        </a:xfrm>
+      </p:grpSpPr>
+      <p:sp>
+        <p:nvSpPr>
+          <p:cNvPr id="2" name="Slide Image Placeholder 1"/>
+          <p:cNvSpPr>
+            <a:spLocks noGrp="1"/>
+          </p:cNvSpPr>
+          <p:nvPr>
+            <p:ph type="sldImg" idx="2"/>
+          </p:nvPr>
+        </p:nvSpPr>
+        <p:spPr/>
+      </p:sp>
+      <p:sp>
+        <p:nvSpPr>
+          <p:cNvPr id="3" name="Notes Placeholder 2"/>
+          <p:cNvSpPr>
+            <a:spLocks noGrp="1"/>
+          </p:cNvSpPr>
+          <p:nvPr>
+            <p:ph type="body" idx="3" sz="quarter"/>
+          </p:nvPr>
+        </p:nvSpPr>
+        <p:spPr/>
+        <p:txBody>
+          <a:bodyPr/>
+          <a:lstStyle/>
+          <a:p>
+            <a:r>
+              <a:t>Aula 7. Corrigir não basta: é preciso PROVAR que a correção funciona e não regride. Vemos os tipos de teste de segurança e onde cada um entra no CI/CD. Entregável: testes que exercitam os controles + evidências no pipeline (Fase 5).</a:t>
+            </a:r>
+          </a:p>
+        </p:txBody>
+      </p:sp>
+      <p:sp>
+        <p:nvSpPr>
+          <p:cNvPr id="4" name="Slide Number Placeholder 3"/>
+          <p:cNvSpPr>
+            <a:spLocks noGrp="1"/>
+          </p:cNvSpPr>
+          <p:nvPr>
+            <p:ph type="sldNum" idx="5" sz="quarter"/>
+          </p:nvPr>
+        </p:nvSpPr>
+        <p:spPr/>
+      </p:sp>
+    </p:spTree>
+  </p:cSld>
+  <p:clrMapOvr>
+    <a:masterClrMapping/>
+  </p:clrMapOvr>
+</p:notes>
+</file>
+
+<file path=ppt/notesSlides/notesSlide2.xml><?xml version="1.0" encoding="utf-8"?>
+<p:notes xmlns:a="http://schemas.openxmlformats.org/drawingml/2006/main" xmlns:p="http://schemas.openxmlformats.org/presentationml/2006/main" xmlns:r="http://schemas.openxmlformats.org/officeDocument/2006/relationships">
+  <p:cSld>
+    <p:spTree>
+      <p:nvGrpSpPr>
+        <p:cNvPr id="1" name=""/>
+        <p:cNvGrpSpPr/>
+        <p:nvPr/>
+      </p:nvGrpSpPr>
+      <p:grpSpPr>
+        <a:xfrm>
+          <a:off x="0" y="0"/>
+          <a:ext cx="0" cy="0"/>
+          <a:chOff x="0" y="0"/>
+          <a:chExt cx="0" cy="0"/>
+        </a:xfrm>
+      </p:grpSpPr>
+      <p:sp>
+        <p:nvSpPr>
+          <p:cNvPr id="2" name="Slide Image Placeholder 1"/>
+          <p:cNvSpPr>
+            <a:spLocks noGrp="1"/>
+          </p:cNvSpPr>
+          <p:nvPr>
+            <p:ph type="sldImg" idx="2"/>
+          </p:nvPr>
+        </p:nvSpPr>
+        <p:spPr/>
+      </p:sp>
+      <p:sp>
+        <p:nvSpPr>
+          <p:cNvPr id="3" name="Notes Placeholder 2"/>
+          <p:cNvSpPr>
+            <a:spLocks noGrp="1"/>
+          </p:cNvSpPr>
+          <p:nvPr>
+            <p:ph type="body" idx="3" sz="quarter"/>
+          </p:nvPr>
+        </p:nvSpPr>
+        <p:spPr/>
+        <p:txBody>
+          <a:bodyPr/>
+          <a:lstStyle/>
+          <a:p>
+            <a:r>
+              <a:t>Cada teste enxerga uma fatia. SAST lê o código-fonte (bom para SQLi, hardcoded secret); DAST ataca a app viva (bom para headers, config, path traversal); SCA cuida das dependências; pentest traz a visão humana do atacante. IDOR e RBAC são falhas LÓGICAS — não aparecem em scanner genérico; precisam de teste de segurança escrito.</a:t>
+            </a:r>
+          </a:p>
+        </p:txBody>
+      </p:sp>
+      <p:sp>
+        <p:nvSpPr>
+          <p:cNvPr id="4" name="Slide Number Placeholder 3"/>
+          <p:cNvSpPr>
+            <a:spLocks noGrp="1"/>
+          </p:cNvSpPr>
+          <p:nvPr>
+            <p:ph type="sldNum" idx="5" sz="quarter"/>
+          </p:nvPr>
+        </p:nvSpPr>
+        <p:spPr/>
+      </p:sp>
+    </p:spTree>
+  </p:cSld>
+  <p:clrMapOvr>
+    <a:masterClrMapping/>
+  </p:clrMapOvr>
+</p:notes>
+</file>
+
+<file path=ppt/notesSlides/notesSlide3.xml><?xml version="1.0" encoding="utf-8"?>
+<p:notes xmlns:a="http://schemas.openxmlformats.org/drawingml/2006/main" xmlns:p="http://schemas.openxmlformats.org/presentationml/2006/main" xmlns:r="http://schemas.openxmlformats.org/officeDocument/2006/relationships">
+  <p:cSld>
+    <p:spTree>
+      <p:nvGrpSpPr>
+        <p:cNvPr id="1" name=""/>
+        <p:cNvGrpSpPr/>
+        <p:nvPr/>
+      </p:nvGrpSpPr>
+      <p:grpSpPr>
+        <a:xfrm>
+          <a:off x="0" y="0"/>
+          <a:ext cx="0" cy="0"/>
+          <a:chOff x="0" y="0"/>
+          <a:chExt cx="0" cy="0"/>
+        </a:xfrm>
+      </p:grpSpPr>
+      <p:sp>
+        <p:nvSpPr>
+          <p:cNvPr id="2" name="Slide Image Placeholder 1"/>
+          <p:cNvSpPr>
+            <a:spLocks noGrp="1"/>
+          </p:cNvSpPr>
+          <p:nvPr>
+            <p:ph type="sldImg" idx="2"/>
+          </p:nvPr>
+        </p:nvSpPr>
+        <p:spPr/>
+      </p:sp>
+      <p:sp>
+        <p:nvSpPr>
+          <p:cNvPr id="3" name="Notes Placeholder 2"/>
+          <p:cNvSpPr>
+            <a:spLocks noGrp="1"/>
+          </p:cNvSpPr>
+          <p:nvPr>
+            <p:ph type="body" idx="3" sz="quarter"/>
+          </p:nvPr>
+        </p:nvSpPr>
+        <p:spPr/>
+        <p:txBody>
+          <a:bodyPr/>
+          <a:lstStyle/>
+          <a:p>
+            <a:r>
+              <a:t>Os testes se distribuem ao longo do pipeline (shift-left à esquerda, shift-right à direita). Rápidos e baratos cedo (linter, SAST, secret scan a cada commit); caros e profundos depois (DAST no pre-deploy, pentest 1-2x por ano). No VidaPlus, o pipeline já traz SAST, SCA, DAST (ZAP) e um gate de testes de segurança com MySQL.</a:t>
+            </a:r>
+          </a:p>
+        </p:txBody>
+      </p:sp>
+      <p:sp>
+        <p:nvSpPr>
+          <p:cNvPr id="4" name="Slide Number Placeholder 3"/>
+          <p:cNvSpPr>
+            <a:spLocks noGrp="1"/>
+          </p:cNvSpPr>
+          <p:nvPr>
+            <p:ph type="sldNum" idx="5" sz="quarter"/>
+          </p:nvPr>
+        </p:nvSpPr>
+        <p:spPr/>
+      </p:sp>
+    </p:spTree>
+  </p:cSld>
+  <p:clrMapOvr>
+    <a:masterClrMapping/>
+  </p:clrMapOvr>
+</p:notes>
+</file>
+
+<file path=ppt/notesSlides/notesSlide4.xml><?xml version="1.0" encoding="utf-8"?>
+<p:notes xmlns:a="http://schemas.openxmlformats.org/drawingml/2006/main" xmlns:p="http://schemas.openxmlformats.org/presentationml/2006/main" xmlns:r="http://schemas.openxmlformats.org/officeDocument/2006/relationships">
+  <p:cSld>
+    <p:spTree>
+      <p:nvGrpSpPr>
+        <p:cNvPr id="1" name=""/>
+        <p:cNvGrpSpPr/>
+        <p:nvPr/>
+      </p:nvGrpSpPr>
+      <p:grpSpPr>
+        <a:xfrm>
+          <a:off x="0" y="0"/>
+          <a:ext cx="0" cy="0"/>
+          <a:chOff x="0" y="0"/>
+          <a:chExt cx="0" cy="0"/>
+        </a:xfrm>
+      </p:grpSpPr>
+      <p:sp>
+        <p:nvSpPr>
+          <p:cNvPr id="2" name="Slide Image Placeholder 1"/>
+          <p:cNvSpPr>
+            <a:spLocks noGrp="1"/>
+          </p:cNvSpPr>
+          <p:nvPr>
+            <p:ph type="sldImg" idx="2"/>
+          </p:nvPr>
+        </p:nvSpPr>
+        <p:spPr/>
+      </p:sp>
+      <p:sp>
+        <p:nvSpPr>
+          <p:cNvPr id="3" name="Notes Placeholder 2"/>
+          <p:cNvSpPr>
+            <a:spLocks noGrp="1"/>
+          </p:cNvSpPr>
+          <p:nvPr>
+            <p:ph type="body" idx="3" sz="quarter"/>
+          </p:nvPr>
+        </p:nvSpPr>
+        <p:spPr/>
+        <p:txBody>
+          <a:bodyPr/>
+          <a:lstStyle/>
+          <a:p>
+            <a:r>
+              <a:t>Verificação pergunta 'construímos o produto certo?' (atende à especificação). Validação pergunta 'construímos a coisa certa?' (resolve o risco real; há ameaça sem requisito?). As duas são necessárias: um controle pode passar no teste (verificado) e ainda assim deixar uma ameaça descoberta (falha de validação).</a:t>
+            </a:r>
+          </a:p>
+        </p:txBody>
+      </p:sp>
+      <p:sp>
+        <p:nvSpPr>
+          <p:cNvPr id="4" name="Slide Number Placeholder 3"/>
+          <p:cNvSpPr>
+            <a:spLocks noGrp="1"/>
+          </p:cNvSpPr>
+          <p:nvPr>
+            <p:ph type="sldNum" idx="5" sz="quarter"/>
+          </p:nvPr>
+        </p:nvSpPr>
+        <p:spPr/>
+      </p:sp>
+    </p:spTree>
+  </p:cSld>
+  <p:clrMapOvr>
+    <a:masterClrMapping/>
+  </p:clrMapOvr>
+</p:notes>
+</file>
+
+<file path=ppt/notesSlides/notesSlide5.xml><?xml version="1.0" encoding="utf-8"?>
+<p:notes xmlns:a="http://schemas.openxmlformats.org/drawingml/2006/main" xmlns:p="http://schemas.openxmlformats.org/presentationml/2006/main" xmlns:r="http://schemas.openxmlformats.org/officeDocument/2006/relationships">
+  <p:cSld>
+    <p:spTree>
+      <p:nvGrpSpPr>
+        <p:cNvPr id="1" name=""/>
+        <p:cNvGrpSpPr/>
+        <p:nvPr/>
+      </p:nvGrpSpPr>
+      <p:grpSpPr>
+        <a:xfrm>
+          <a:off x="0" y="0"/>
+          <a:ext cx="0" cy="0"/>
+          <a:chOff x="0" y="0"/>
+          <a:chExt cx="0" cy="0"/>
+        </a:xfrm>
+      </p:grpSpPr>
+      <p:sp>
+        <p:nvSpPr>
+          <p:cNvPr id="2" name="Slide Image Placeholder 1"/>
+          <p:cNvSpPr>
+            <a:spLocks noGrp="1"/>
+          </p:cNvSpPr>
+          <p:nvPr>
+            <p:ph type="sldImg" idx="2"/>
+          </p:nvPr>
+        </p:nvSpPr>
+        <p:spPr/>
+      </p:sp>
+      <p:sp>
+        <p:nvSpPr>
+          <p:cNvPr id="3" name="Notes Placeholder 2"/>
+          <p:cNvSpPr>
+            <a:spLocks noGrp="1"/>
+          </p:cNvSpPr>
+          <p:nvPr>
+            <p:ph type="body" idx="3" sz="quarter"/>
+          </p:nvPr>
+        </p:nvSpPr>
+        <p:spPr/>
+        <p:txBody>
+          <a:bodyPr/>
+          <a:lstStyle/>
+          <a:p>
+            <a:r>
+              <a:t>Um teste só prova algo se FALHA quando a proteção some ('quebrar para ver vermelho'). Este cenário BDD é o teste de aceite do IDOR: no legado ele falha (o app devolve 200); após a correção, passa (403). É a evidência que sustenta a linha na matriz de rastreabilidade.</a:t>
+            </a:r>
+          </a:p>
+        </p:txBody>
+      </p:sp>
+      <p:sp>
+        <p:nvSpPr>
+          <p:cNvPr id="4" name="Slide Number Placeholder 3"/>
+          <p:cNvSpPr>
+            <a:spLocks noGrp="1"/>
+          </p:cNvSpPr>
+          <p:nvPr>
+            <p:ph type="sldNum" idx="5" sz="quarter"/>
+          </p:nvPr>
+        </p:nvSpPr>
+        <p:spPr/>
+      </p:sp>
+    </p:spTree>
+  </p:cSld>
+  <p:clrMapOvr>
+    <a:masterClrMapping/>
+  </p:clrMapOvr>
+</p:notes>
+</file>
+
+<file path=ppt/notesSlides/notesSlide6.xml><?xml version="1.0" encoding="utf-8"?>
+<p:notes xmlns:a="http://schemas.openxmlformats.org/drawingml/2006/main" xmlns:p="http://schemas.openxmlformats.org/presentationml/2006/main" xmlns:r="http://schemas.openxmlformats.org/officeDocument/2006/relationships">
+  <p:cSld>
+    <p:spTree>
+      <p:nvGrpSpPr>
+        <p:cNvPr id="1" name=""/>
+        <p:cNvGrpSpPr/>
+        <p:nvPr/>
+      </p:nvGrpSpPr>
+      <p:grpSpPr>
+        <a:xfrm>
+          <a:off x="0" y="0"/>
+          <a:ext cx="0" cy="0"/>
+          <a:chOff x="0" y="0"/>
+          <a:chExt cx="0" cy="0"/>
+        </a:xfrm>
+      </p:grpSpPr>
+      <p:sp>
+        <p:nvSpPr>
+          <p:cNvPr id="2" name="Slide Image Placeholder 1"/>
+          <p:cNvSpPr>
+            <a:spLocks noGrp="1"/>
+          </p:cNvSpPr>
+          <p:nvPr>
+            <p:ph type="sldImg" idx="2"/>
+          </p:nvPr>
+        </p:nvSpPr>
+        <p:spPr/>
+      </p:sp>
+      <p:sp>
+        <p:nvSpPr>
+          <p:cNvPr id="3" name="Notes Placeholder 2"/>
+          <p:cNvSpPr>
+            <a:spLocks noGrp="1"/>
+          </p:cNvSpPr>
+          <p:nvPr>
+            <p:ph type="body" idx="3" sz="quarter"/>
+          </p:nvPr>
+        </p:nvSpPr>
+        <p:spPr/>
+        <p:txBody>
+          <a:bodyPr/>
+          <a:lstStyle/>
+          <a:p>
+            <a:r>
+              <a:t>Escreva o teste que exercita o controle da sua PoC e ligue os scanners ao CI como evidência. Quando a correção estiver sólida, torne o gate BLOQUEANTE (remova o continue-on-error) — a partir daí, qualquer regressão barra o merge. Uma linha da matriz sem teste = requisito NÃO verificado.</a:t>
+            </a:r>
+          </a:p>
+        </p:txBody>
+      </p:sp>
+      <p:sp>
+        <p:nvSpPr>
+          <p:cNvPr id="4" name="Slide Number Placeholder 3"/>
+          <p:cNvSpPr>
+            <a:spLocks noGrp="1"/>
+          </p:cNvSpPr>
+          <p:nvPr>
+            <p:ph type="sldNum" idx="5" sz="quarter"/>
+          </p:nvPr>
+        </p:nvSpPr>
+        <p:spPr/>
+      </p:sp>
+    </p:spTree>
+  </p:cSld>
+  <p:clrMapOvr>
+    <a:masterClrMapping/>
+  </p:clrMapOvr>
+</p:notes>
 </file>
 
 <file path=ppt/slideLayouts/slideLayout1.xml><?xml version="1.0" encoding="utf-8"?>
@@ -3441,6 +4212,316 @@
 </p:sld>
 </file>
 
+<file path=ppt/slides/slide10.xml><?xml version="1.0" encoding="utf-8"?>
+<p:sld xmlns:a="http://schemas.openxmlformats.org/drawingml/2006/main" xmlns:p="http://schemas.openxmlformats.org/presentationml/2006/main" xmlns:r="http://schemas.openxmlformats.org/officeDocument/2006/relationships">
+  <p:cSld>
+    <p:spTree>
+      <p:nvGrpSpPr>
+        <p:cNvPr id="1" name=""/>
+        <p:cNvGrpSpPr/>
+        <p:nvPr/>
+      </p:nvGrpSpPr>
+      <p:grpSpPr/>
+      <p:sp>
+        <p:nvSpPr>
+          <p:cNvPr id="2" name="Rectangle 1"/>
+          <p:cNvSpPr/>
+          <p:nvPr/>
+        </p:nvSpPr>
+        <p:spPr>
+          <a:xfrm>
+            <a:off x="0" y="0"/>
+            <a:ext cx="12191695" cy="6858000"/>
+          </a:xfrm>
+          <a:prstGeom prst="rect">
+            <a:avLst/>
+          </a:prstGeom>
+          <a:solidFill>
+            <a:srgbClr val="1F5232"/>
+          </a:solidFill>
+          <a:ln>
+            <a:noFill/>
+          </a:ln>
+          <a:effectLst/>
+        </p:spPr>
+        <p:style>
+          <a:lnRef idx="1">
+            <a:schemeClr val="accent1"/>
+          </a:lnRef>
+          <a:fillRef idx="3">
+            <a:schemeClr val="accent1"/>
+          </a:fillRef>
+          <a:effectRef idx="2">
+            <a:schemeClr val="accent1"/>
+          </a:effectRef>
+          <a:fontRef idx="minor">
+            <a:schemeClr val="lt1"/>
+          </a:fontRef>
+        </p:style>
+        <p:txBody>
+          <a:bodyPr rtlCol="0" anchor="ctr"/>
+          <a:lstStyle/>
+          <a:p>
+            <a:pPr algn="ctr"/>
+          </a:p>
+        </p:txBody>
+      </p:sp>
+      <p:pic>
+        <p:nvPicPr>
+          <p:cNvPr id="3" name="Picture 2" descr="logo_branco.png"/>
+          <p:cNvPicPr>
+            <a:picLocks noChangeAspect="1"/>
+          </p:cNvPicPr>
+          <p:nvPr/>
+        </p:nvPicPr>
+        <p:blipFill>
+          <a:blip r:embed="rId2"/>
+          <a:stretch>
+            <a:fillRect/>
+          </a:stretch>
+        </p:blipFill>
+        <p:spPr>
+          <a:xfrm>
+            <a:off x="4142232" y="548640"/>
+            <a:ext cx="3909060" cy="868680"/>
+          </a:xfrm>
+          <a:prstGeom prst="rect">
+            <a:avLst/>
+          </a:prstGeom>
+        </p:spPr>
+      </p:pic>
+      <p:sp>
+        <p:nvSpPr>
+          <p:cNvPr id="4" name="TextBox 3"/>
+          <p:cNvSpPr txBox="1"/>
+          <p:nvPr/>
+        </p:nvSpPr>
+        <p:spPr>
+          <a:xfrm>
+            <a:off x="457200" y="2194560"/>
+            <a:ext cx="11247120" cy="1371600"/>
+          </a:xfrm>
+          <a:prstGeom prst="rect">
+            <a:avLst/>
+          </a:prstGeom>
+          <a:noFill/>
+        </p:spPr>
+        <p:txBody>
+          <a:bodyPr wrap="square" anchor="t" lIns="0" rIns="0" tIns="0" bIns="0">
+            <a:spAutoFit/>
+          </a:bodyPr>
+          <a:lstStyle/>
+          <a:p>
+            <a:pPr algn="ctr">
+              <a:lnSpc>
+                <a:spcPct val="100000"/>
+              </a:lnSpc>
+              <a:spcBef>
+                <a:spcPts val="0"/>
+              </a:spcBef>
+              <a:spcAft>
+                <a:spcPts val="600"/>
+              </a:spcAft>
+            </a:pPr>
+            <a:r>
+              <a:rPr sz="8800" b="1" i="0">
+                <a:solidFill>
+                  <a:srgbClr val="7CB342"/>
+                </a:solidFill>
+                <a:latin typeface="Open Sans"/>
+              </a:rPr>
+              <a:t>Perguntas?</a:t>
+            </a:r>
+          </a:p>
+        </p:txBody>
+      </p:sp>
+      <p:sp>
+        <p:nvSpPr>
+          <p:cNvPr id="5" name="Rectangle 4"/>
+          <p:cNvSpPr/>
+          <p:nvPr/>
+        </p:nvSpPr>
+        <p:spPr>
+          <a:xfrm>
+            <a:off x="5184648" y="3977639"/>
+            <a:ext cx="1828800" cy="25400"/>
+          </a:xfrm>
+          <a:prstGeom prst="rect">
+            <a:avLst/>
+          </a:prstGeom>
+          <a:solidFill>
+            <a:srgbClr val="7CB342"/>
+          </a:solidFill>
+          <a:ln>
+            <a:noFill/>
+          </a:ln>
+          <a:effectLst/>
+        </p:spPr>
+        <p:style>
+          <a:lnRef idx="1">
+            <a:schemeClr val="accent1"/>
+          </a:lnRef>
+          <a:fillRef idx="3">
+            <a:schemeClr val="accent1"/>
+          </a:fillRef>
+          <a:effectRef idx="2">
+            <a:schemeClr val="accent1"/>
+          </a:effectRef>
+          <a:fontRef idx="minor">
+            <a:schemeClr val="lt1"/>
+          </a:fontRef>
+        </p:style>
+        <p:txBody>
+          <a:bodyPr rtlCol="0" anchor="ctr"/>
+          <a:lstStyle/>
+          <a:p>
+            <a:pPr algn="ctr"/>
+          </a:p>
+        </p:txBody>
+      </p:sp>
+      <p:sp>
+        <p:nvSpPr>
+          <p:cNvPr id="6" name="TextBox 5"/>
+          <p:cNvSpPr txBox="1"/>
+          <p:nvPr/>
+        </p:nvSpPr>
+        <p:spPr>
+          <a:xfrm>
+            <a:off x="457200" y="4297680"/>
+            <a:ext cx="11247120" cy="457200"/>
+          </a:xfrm>
+          <a:prstGeom prst="rect">
+            <a:avLst/>
+          </a:prstGeom>
+          <a:noFill/>
+        </p:spPr>
+        <p:txBody>
+          <a:bodyPr wrap="square" anchor="t" lIns="0" rIns="0" tIns="0" bIns="0">
+            <a:spAutoFit/>
+          </a:bodyPr>
+          <a:lstStyle/>
+          <a:p>
+            <a:pPr algn="ctr">
+              <a:lnSpc>
+                <a:spcPct val="100000"/>
+              </a:lnSpc>
+              <a:spcBef>
+                <a:spcPts val="0"/>
+              </a:spcBef>
+              <a:spcAft>
+                <a:spcPts val="600"/>
+              </a:spcAft>
+            </a:pPr>
+            <a:r>
+              <a:rPr sz="2200" b="1" i="0">
+                <a:solidFill>
+                  <a:srgbClr val="FFFFFF"/>
+                </a:solidFill>
+                <a:latin typeface="Open Sans"/>
+              </a:rPr>
+              <a:t>Prof. Dr. Alex Mulattieri Suarez Orozco</a:t>
+            </a:r>
+          </a:p>
+        </p:txBody>
+      </p:sp>
+      <p:sp>
+        <p:nvSpPr>
+          <p:cNvPr id="7" name="TextBox 6"/>
+          <p:cNvSpPr txBox="1"/>
+          <p:nvPr/>
+        </p:nvSpPr>
+        <p:spPr>
+          <a:xfrm>
+            <a:off x="457200" y="4800600"/>
+            <a:ext cx="11247120" cy="457200"/>
+          </a:xfrm>
+          <a:prstGeom prst="rect">
+            <a:avLst/>
+          </a:prstGeom>
+          <a:noFill/>
+        </p:spPr>
+        <p:txBody>
+          <a:bodyPr wrap="square" anchor="t" lIns="0" rIns="0" tIns="0" bIns="0">
+            <a:spAutoFit/>
+          </a:bodyPr>
+          <a:lstStyle/>
+          <a:p>
+            <a:pPr algn="ctr">
+              <a:lnSpc>
+                <a:spcPct val="100000"/>
+              </a:lnSpc>
+              <a:spcBef>
+                <a:spcPts val="0"/>
+              </a:spcBef>
+              <a:spcAft>
+                <a:spcPts val="600"/>
+              </a:spcAft>
+            </a:pPr>
+            <a:r>
+              <a:rPr sz="1800" b="0" i="1">
+                <a:solidFill>
+                  <a:srgbClr val="CCD7C0"/>
+                </a:solidFill>
+                <a:latin typeface="Open Sans"/>
+              </a:rPr>
+              <a:t>alexorozco@ifsul.edu.br</a:t>
+            </a:r>
+          </a:p>
+        </p:txBody>
+      </p:sp>
+      <p:sp>
+        <p:nvSpPr>
+          <p:cNvPr id="8" name="TextBox 7"/>
+          <p:cNvSpPr txBox="1"/>
+          <p:nvPr/>
+        </p:nvSpPr>
+        <p:spPr>
+          <a:xfrm>
+            <a:off x="457200" y="5943600"/>
+            <a:ext cx="11247120" cy="457200"/>
+          </a:xfrm>
+          <a:prstGeom prst="rect">
+            <a:avLst/>
+          </a:prstGeom>
+          <a:noFill/>
+        </p:spPr>
+        <p:txBody>
+          <a:bodyPr wrap="square" anchor="t" lIns="0" rIns="0" tIns="0" bIns="0">
+            <a:spAutoFit/>
+          </a:bodyPr>
+          <a:lstStyle/>
+          <a:p>
+            <a:pPr algn="ctr">
+              <a:lnSpc>
+                <a:spcPct val="100000"/>
+              </a:lnSpc>
+              <a:spcBef>
+                <a:spcPts val="0"/>
+              </a:spcBef>
+              <a:spcAft>
+                <a:spcPts val="600"/>
+              </a:spcAft>
+            </a:pPr>
+            <a:r>
+              <a:rPr sz="1400" b="0" i="0">
+                <a:solidFill>
+                  <a:srgbClr val="CCD7C0"/>
+                </a:solidFill>
+                <a:latin typeface="Open Sans"/>
+              </a:rPr>
+              <a:t>IFSul · Câmpus Sapucaia do Sul</a:t>
+            </a:r>
+          </a:p>
+        </p:txBody>
+      </p:sp>
+    </p:spTree>
+  </p:cSld>
+  <p:clrMapOvr>
+    <a:masterClrMapping/>
+  </p:clrMapOvr>
+</p:sld>
+</file>
+
 <file path=ppt/slides/slide2.xml><?xml version="1.0" encoding="utf-8"?>
 <p:sld xmlns:a="http://schemas.openxmlformats.org/drawingml/2006/main" xmlns:p="http://schemas.openxmlformats.org/presentationml/2006/main" xmlns:r="http://schemas.openxmlformats.org/officeDocument/2006/relationships">
   <p:cSld>
@@ -3821,7 +4902,7 @@
                 </a:solidFill>
                 <a:latin typeface="Open Sans"/>
               </a:rPr>
-              <a:t>Use combinados</a:t>
+              <a:t>Use combinados — nenhum sozinho basta</a:t>
             </a:r>
           </a:p>
         </p:txBody>
@@ -4046,7 +5127,7 @@
                 </a:solidFill>
                 <a:latin typeface="Open Sans"/>
               </a:rPr>
-              <a:t>lê o código sem executar</a:t>
+              <a:t>lê o código sem executar (Semgrep, CodeQL)</a:t>
             </a:r>
           </a:p>
         </p:txBody>
@@ -4271,7 +5352,7 @@
                 </a:solidFill>
                 <a:latin typeface="Open Sans"/>
               </a:rPr>
-              <a:t>ataca a app rodando</a:t>
+              <a:t>ataca a aplicação rodando (OWASP ZAP)</a:t>
             </a:r>
           </a:p>
         </p:txBody>
@@ -4496,7 +5577,7 @@
                 </a:solidFill>
                 <a:latin typeface="Open Sans"/>
               </a:rPr>
-              <a:t>instrumenta durante os testes</a:t>
+              <a:t>instrumenta a app durante os testes</a:t>
             </a:r>
           </a:p>
         </p:txBody>
@@ -4721,7 +5802,7 @@
                 </a:solidFill>
                 <a:latin typeface="Open Sans"/>
               </a:rPr>
-              <a:t>dependências e CVEs</a:t>
+              <a:t>analisa dependências e busca CVEs</a:t>
             </a:r>
           </a:p>
         </p:txBody>
@@ -4946,7 +6027,7 @@
                 </a:solidFill>
                 <a:latin typeface="Open Sans"/>
               </a:rPr>
-              <a:t>entradas inesperadas</a:t>
+              <a:t>bombardeia com entradas inesperadas</a:t>
             </a:r>
           </a:p>
         </p:txBody>
@@ -5171,7 +6252,7 @@
                 </a:solidFill>
                 <a:latin typeface="Open Sans"/>
               </a:rPr>
-              <a:t>especialista humano</a:t>
+              <a:t>especialista humano simula o ataque</a:t>
             </a:r>
           </a:p>
         </p:txBody>
@@ -5368,7 +6449,7 @@
                 </a:solidFill>
                 <a:latin typeface="Open Sans"/>
               </a:rPr>
-              <a:t>Sequência típica</a:t>
+              <a:t>Sequência típica em pipeline maduro</a:t>
             </a:r>
           </a:p>
         </p:txBody>
@@ -6043,7 +7124,7 @@
                 </a:solidFill>
                 <a:latin typeface="Open Sans"/>
               </a:rPr>
-              <a:t>segundos a min</a:t>
+              <a:t>segundos a minutos</a:t>
             </a:r>
           </a:p>
         </p:txBody>
@@ -6223,7 +7304,7 @@
                 </a:solidFill>
                 <a:latin typeface="Open Sans"/>
               </a:rPr>
-              <a:t>IAST · integração</a:t>
+              <a:t>IAST · testes de integração</a:t>
             </a:r>
           </a:p>
         </p:txBody>
@@ -6673,7 +7754,7 @@
                 </a:solidFill>
                 <a:latin typeface="Open Sans"/>
               </a:rPr>
-              <a:t>RASP · WAF · monitor</a:t>
+              <a:t>RASP · WAF · monitoração</a:t>
             </a:r>
           </a:p>
         </p:txBody>
@@ -7612,7 +8693,7 @@
                 </a:solidFill>
                 <a:latin typeface="Open Sans"/>
               </a:rPr>
-              <a:t>Resolve o risco real?</a:t>
+              <a:t>Resolve o risco real do negócio?</a:t>
             </a:r>
           </a:p>
           <a:p>
@@ -7696,7 +8777,7 @@
                 </a:solidFill>
                 <a:latin typeface="Open Sans"/>
               </a:rPr>
-              <a:t>Risco residual aceitável?</a:t>
+              <a:t>O risco residual é aceitável?</a:t>
             </a:r>
           </a:p>
         </p:txBody>
@@ -7773,13 +8854,13 @@
         <p:spPr>
           <a:xfrm>
             <a:off x="0" y="0"/>
-            <a:ext cx="12191695" cy="6858000"/>
+            <a:ext cx="12191695" cy="1234440"/>
           </a:xfrm>
           <a:prstGeom prst="rect">
             <a:avLst/>
           </a:prstGeom>
           <a:solidFill>
-            <a:srgbClr val="1F5232"/>
+            <a:srgbClr val="2D7A3D"/>
           </a:solidFill>
           <a:ln>
             <a:noFill/>
@@ -7816,8 +8897,8 @@
         </p:nvSpPr>
         <p:spPr>
           <a:xfrm>
-            <a:off x="457200" y="2194560"/>
-            <a:ext cx="11247120" cy="548640"/>
+            <a:off x="457200" y="164592"/>
+            <a:ext cx="11247120" cy="640080"/>
           </a:xfrm>
           <a:prstGeom prst="rect">
             <a:avLst/>
@@ -7830,7 +8911,7 @@
           </a:bodyPr>
           <a:lstStyle/>
           <a:p>
-            <a:pPr algn="ctr">
+            <a:pPr algn="l">
               <a:lnSpc>
                 <a:spcPct val="100000"/>
               </a:lnSpc>
@@ -7842,13 +8923,13 @@
               </a:spcAft>
             </a:pPr>
             <a:r>
-              <a:rPr sz="2000" b="1" i="0">
-                <a:solidFill>
-                  <a:srgbClr val="7CB342"/>
-                </a:solidFill>
-                <a:latin typeface="Open Sans"/>
-              </a:rPr>
-              <a:t>PARTE 3</a:t>
+              <a:rPr sz="3200" b="1" i="0">
+                <a:solidFill>
+                  <a:srgbClr val="FFFFFF"/>
+                </a:solidFill>
+                <a:latin typeface="Open Sans"/>
+              </a:rPr>
+              <a:t>Exemplo: teste anti-IDOR (BDD)</a:t>
             </a:r>
           </a:p>
         </p:txBody>
@@ -7861,8 +8942,8 @@
         </p:nvSpPr>
         <p:spPr>
           <a:xfrm>
-            <a:off x="457200" y="2834640"/>
-            <a:ext cx="11247120" cy="1280160"/>
+            <a:off x="457200" y="777240"/>
+            <a:ext cx="11247120" cy="365760"/>
           </a:xfrm>
           <a:prstGeom prst="rect">
             <a:avLst/>
@@ -7875,7 +8956,7 @@
           </a:bodyPr>
           <a:lstStyle/>
           <a:p>
-            <a:pPr algn="ctr">
+            <a:pPr algn="l">
               <a:lnSpc>
                 <a:spcPct val="100000"/>
               </a:lnSpc>
@@ -7887,27 +8968,281 @@
               </a:spcAft>
             </a:pPr>
             <a:r>
-              <a:rPr sz="6000" b="1" i="0">
-                <a:solidFill>
-                  <a:srgbClr val="FFFFFF"/>
-                </a:solidFill>
-                <a:latin typeface="Open Sans"/>
-              </a:rPr>
-              <a:t>No VidaPlus</a:t>
-            </a:r>
-          </a:p>
-        </p:txBody>
-      </p:sp>
-      <p:sp>
-        <p:nvSpPr>
-          <p:cNvPr id="5" name="TextBox 4"/>
+              <a:rPr sz="1600" b="0" i="1">
+                <a:solidFill>
+                  <a:srgbClr val="E0E8DB"/>
+                </a:solidFill>
+                <a:latin typeface="Open Sans"/>
+              </a:rPr>
+              <a:t>O requisito vira teste executável</a:t>
+            </a:r>
+          </a:p>
+        </p:txBody>
+      </p:sp>
+      <p:sp>
+        <p:nvSpPr>
+          <p:cNvPr id="5" name="Rounded Rectangle 4"/>
+          <p:cNvSpPr/>
+          <p:nvPr/>
+        </p:nvSpPr>
+        <p:spPr>
+          <a:xfrm>
+            <a:off x="411480" y="1463040"/>
+            <a:ext cx="11384280" cy="5029200"/>
+          </a:xfrm>
+          <a:prstGeom prst="roundRect">
+            <a:avLst/>
+          </a:prstGeom>
+          <a:solidFill>
+            <a:srgbClr val="F5F5F5"/>
+          </a:solidFill>
+          <a:ln w="15875">
+            <a:solidFill>
+              <a:srgbClr val="7CB342"/>
+            </a:solidFill>
+          </a:ln>
+          <a:effectLst/>
+        </p:spPr>
+        <p:style>
+          <a:lnRef idx="1">
+            <a:schemeClr val="accent1"/>
+          </a:lnRef>
+          <a:fillRef idx="3">
+            <a:schemeClr val="accent1"/>
+          </a:fillRef>
+          <a:effectRef idx="2">
+            <a:schemeClr val="accent1"/>
+          </a:effectRef>
+          <a:fontRef idx="minor">
+            <a:schemeClr val="lt1"/>
+          </a:fontRef>
+        </p:style>
+        <p:txBody>
+          <a:bodyPr rtlCol="0" anchor="ctr"/>
+          <a:lstStyle/>
+          <a:p>
+            <a:pPr algn="ctr"/>
+          </a:p>
+        </p:txBody>
+      </p:sp>
+      <p:sp>
+        <p:nvSpPr>
+          <p:cNvPr id="6" name="TextBox 5"/>
           <p:cNvSpPr txBox="1"/>
           <p:nvPr/>
         </p:nvSpPr>
         <p:spPr>
           <a:xfrm>
-            <a:off x="457200" y="4297680"/>
-            <a:ext cx="11247120" cy="457200"/>
+            <a:off x="868680" y="1783080"/>
+            <a:ext cx="10515600" cy="4572000"/>
+          </a:xfrm>
+          <a:prstGeom prst="rect">
+            <a:avLst/>
+          </a:prstGeom>
+          <a:noFill/>
+        </p:spPr>
+        <p:txBody>
+          <a:bodyPr wrap="square">
+            <a:spAutoFit/>
+          </a:bodyPr>
+          <a:lstStyle/>
+          <a:p>
+            <a:pPr algn="l">
+              <a:lnSpc>
+                <a:spcPct val="110000"/>
+              </a:lnSpc>
+              <a:spcAft>
+                <a:spcPts val="1400"/>
+              </a:spcAft>
+            </a:pPr>
+            <a:r>
+              <a:rPr sz="2000" b="1">
+                <a:solidFill>
+                  <a:srgbClr val="7CB342"/>
+                </a:solidFill>
+                <a:latin typeface="Open Sans"/>
+              </a:rPr>
+              <a:t>▸ </a:t>
+            </a:r>
+            <a:r>
+              <a:rPr sz="1800" b="1">
+                <a:solidFill>
+                  <a:srgbClr val="2D7A3D"/>
+                </a:solidFill>
+                <a:latin typeface="Open Sans"/>
+              </a:rPr>
+              <a:t>Cenário: </a:t>
+            </a:r>
+            <a:r>
+              <a:rPr sz="1800">
+                <a:solidFill>
+                  <a:srgbClr val="212121"/>
+                </a:solidFill>
+                <a:latin typeface="Open Sans"/>
+              </a:rPr>
+              <a:t>A autenticado tenta o exame de B.</a:t>
+            </a:r>
+          </a:p>
+          <a:p>
+            <a:pPr algn="l">
+              <a:lnSpc>
+                <a:spcPct val="110000"/>
+              </a:lnSpc>
+              <a:spcAft>
+                <a:spcPts val="1400"/>
+              </a:spcAft>
+            </a:pPr>
+            <a:r>
+              <a:rPr sz="2000" b="1">
+                <a:solidFill>
+                  <a:srgbClr val="7CB342"/>
+                </a:solidFill>
+                <a:latin typeface="Open Sans"/>
+              </a:rPr>
+              <a:t>▸ </a:t>
+            </a:r>
+            <a:r>
+              <a:rPr sz="1800" b="1">
+                <a:solidFill>
+                  <a:srgbClr val="2D7A3D"/>
+                </a:solidFill>
+                <a:latin typeface="Open Sans"/>
+              </a:rPr>
+              <a:t>Dado: </a:t>
+            </a:r>
+            <a:r>
+              <a:rPr sz="1800">
+                <a:solidFill>
+                  <a:srgbClr val="212121"/>
+                </a:solidFill>
+                <a:latin typeface="Open Sans"/>
+              </a:rPr>
+              <a:t>paciente A logado; existe o exame 222, do paciente B.</a:t>
+            </a:r>
+          </a:p>
+          <a:p>
+            <a:pPr algn="l">
+              <a:lnSpc>
+                <a:spcPct val="110000"/>
+              </a:lnSpc>
+              <a:spcAft>
+                <a:spcPts val="1400"/>
+              </a:spcAft>
+            </a:pPr>
+            <a:r>
+              <a:rPr sz="2000" b="1">
+                <a:solidFill>
+                  <a:srgbClr val="7CB342"/>
+                </a:solidFill>
+                <a:latin typeface="Open Sans"/>
+              </a:rPr>
+              <a:t>▸ </a:t>
+            </a:r>
+            <a:r>
+              <a:rPr sz="1800" b="1">
+                <a:solidFill>
+                  <a:srgbClr val="2D7A3D"/>
+                </a:solidFill>
+                <a:latin typeface="Open Sans"/>
+              </a:rPr>
+              <a:t>Quando: </a:t>
+            </a:r>
+            <a:r>
+              <a:rPr sz="1800">
+                <a:solidFill>
+                  <a:srgbClr val="212121"/>
+                </a:solidFill>
+                <a:latin typeface="Open Sans"/>
+              </a:rPr>
+              <a:t>GET /api/exames/222 com o token de A.</a:t>
+            </a:r>
+          </a:p>
+          <a:p>
+            <a:pPr algn="l">
+              <a:lnSpc>
+                <a:spcPct val="110000"/>
+              </a:lnSpc>
+              <a:spcAft>
+                <a:spcPts val="1400"/>
+              </a:spcAft>
+            </a:pPr>
+            <a:r>
+              <a:rPr sz="2000" b="1">
+                <a:solidFill>
+                  <a:srgbClr val="7CB342"/>
+                </a:solidFill>
+                <a:latin typeface="Open Sans"/>
+              </a:rPr>
+              <a:t>▸ </a:t>
+            </a:r>
+            <a:r>
+              <a:rPr sz="1800" b="1">
+                <a:solidFill>
+                  <a:srgbClr val="2D7A3D"/>
+                </a:solidFill>
+                <a:latin typeface="Open Sans"/>
+              </a:rPr>
+              <a:t>Então: </a:t>
+            </a:r>
+            <a:r>
+              <a:rPr sz="1800">
+                <a:solidFill>
+                  <a:srgbClr val="212121"/>
+                </a:solidFill>
+                <a:latin typeface="Open Sans"/>
+              </a:rPr>
+              <a:t>HTTP 403 e nenhum metadado de B na resposta.</a:t>
+            </a:r>
+          </a:p>
+          <a:p>
+            <a:pPr algn="l">
+              <a:lnSpc>
+                <a:spcPct val="110000"/>
+              </a:lnSpc>
+              <a:spcAft>
+                <a:spcPts val="1400"/>
+              </a:spcAft>
+            </a:pPr>
+            <a:r>
+              <a:rPr sz="2000" b="1">
+                <a:solidFill>
+                  <a:srgbClr val="7CB342"/>
+                </a:solidFill>
+                <a:latin typeface="Open Sans"/>
+              </a:rPr>
+              <a:t>▸ </a:t>
+            </a:r>
+            <a:r>
+              <a:rPr sz="1800" b="1">
+                <a:solidFill>
+                  <a:srgbClr val="2D7A3D"/>
+                </a:solidFill>
+                <a:latin typeface="Open Sans"/>
+              </a:rPr>
+              <a:t>Prova negativa: </a:t>
+            </a:r>
+            <a:r>
+              <a:rPr sz="1800">
+                <a:solidFill>
+                  <a:srgbClr val="212121"/>
+                </a:solidFill>
+                <a:latin typeface="Open Sans"/>
+              </a:rPr>
+              <a:t>se a proteção some, o teste fica vermelho e bloqueia o merge.</a:t>
+            </a:r>
+          </a:p>
+        </p:txBody>
+      </p:sp>
+      <p:sp>
+        <p:nvSpPr>
+          <p:cNvPr id="7" name="TextBox 6"/>
+          <p:cNvSpPr txBox="1"/>
+          <p:nvPr/>
+        </p:nvSpPr>
+        <p:spPr>
+          <a:xfrm>
+            <a:off x="10972800" y="6446520"/>
+            <a:ext cx="914400" cy="320040"/>
           </a:xfrm>
           <a:prstGeom prst="rect">
             <a:avLst/>
@@ -7920,7 +9255,7 @@
           </a:bodyPr>
           <a:lstStyle/>
           <a:p>
-            <a:pPr algn="ctr">
+            <a:pPr algn="r">
               <a:lnSpc>
                 <a:spcPct val="100000"/>
               </a:lnSpc>
@@ -7932,58 +9267,14 @@
               </a:spcAft>
             </a:pPr>
             <a:r>
-              <a:rPr sz="2200" b="0" i="1">
-                <a:solidFill>
-                  <a:srgbClr val="CCD7C0"/>
-                </a:solidFill>
-                <a:latin typeface="Open Sans"/>
-              </a:rPr>
-              <a:t>A etapa desta semana (Fase 5)</a:t>
-            </a:r>
-          </a:p>
-        </p:txBody>
-      </p:sp>
-      <p:sp>
-        <p:nvSpPr>
-          <p:cNvPr id="6" name="Rectangle 5"/>
-          <p:cNvSpPr/>
-          <p:nvPr/>
-        </p:nvSpPr>
-        <p:spPr>
-          <a:xfrm>
-            <a:off x="5184648" y="4983480"/>
-            <a:ext cx="1828800" cy="25400"/>
-          </a:xfrm>
-          <a:prstGeom prst="rect">
-            <a:avLst/>
-          </a:prstGeom>
-          <a:solidFill>
-            <a:srgbClr val="7CB342"/>
-          </a:solidFill>
-          <a:ln>
-            <a:noFill/>
-          </a:ln>
-          <a:effectLst/>
-        </p:spPr>
-        <p:style>
-          <a:lnRef idx="1">
-            <a:schemeClr val="accent1"/>
-          </a:lnRef>
-          <a:fillRef idx="3">
-            <a:schemeClr val="accent1"/>
-          </a:fillRef>
-          <a:effectRef idx="2">
-            <a:schemeClr val="accent1"/>
-          </a:effectRef>
-          <a:fontRef idx="minor">
-            <a:schemeClr val="lt1"/>
-          </a:fontRef>
-        </p:style>
-        <p:txBody>
-          <a:bodyPr rtlCol="0" anchor="ctr"/>
-          <a:lstStyle/>
-          <a:p>
-            <a:pPr algn="ctr"/>
+              <a:rPr sz="1100" b="0" i="0">
+                <a:solidFill>
+                  <a:srgbClr val="616161"/>
+                </a:solidFill>
+                <a:latin typeface="Open Sans"/>
+              </a:rPr>
+              <a:t>7</a:t>
+            </a:r>
           </a:p>
         </p:txBody>
       </p:sp>
@@ -8014,13 +9305,13 @@
         <p:spPr>
           <a:xfrm>
             <a:off x="0" y="0"/>
-            <a:ext cx="12191695" cy="1234440"/>
+            <a:ext cx="12191695" cy="6858000"/>
           </a:xfrm>
           <a:prstGeom prst="rect">
             <a:avLst/>
           </a:prstGeom>
           <a:solidFill>
-            <a:srgbClr val="2D7A3D"/>
+            <a:srgbClr val="1F5232"/>
           </a:solidFill>
           <a:ln>
             <a:noFill/>
@@ -8057,8 +9348,8 @@
         </p:nvSpPr>
         <p:spPr>
           <a:xfrm>
-            <a:off x="457200" y="164592"/>
-            <a:ext cx="11247120" cy="640080"/>
+            <a:off x="457200" y="2194560"/>
+            <a:ext cx="11247120" cy="548640"/>
           </a:xfrm>
           <a:prstGeom prst="rect">
             <a:avLst/>
@@ -8071,7 +9362,7 @@
           </a:bodyPr>
           <a:lstStyle/>
           <a:p>
-            <a:pPr algn="l">
+            <a:pPr algn="ctr">
               <a:lnSpc>
                 <a:spcPct val="100000"/>
               </a:lnSpc>
@@ -8083,13 +9374,13 @@
               </a:spcAft>
             </a:pPr>
             <a:r>
-              <a:rPr sz="3200" b="1" i="0">
-                <a:solidFill>
-                  <a:srgbClr val="FFFFFF"/>
-                </a:solidFill>
-                <a:latin typeface="Open Sans"/>
-              </a:rPr>
-              <a:t>Entregável da Fase 5</a:t>
+              <a:rPr sz="2000" b="1" i="0">
+                <a:solidFill>
+                  <a:srgbClr val="7CB342"/>
+                </a:solidFill>
+                <a:latin typeface="Open Sans"/>
+              </a:rPr>
+              <a:t>PARTE 3</a:t>
             </a:r>
           </a:p>
         </p:txBody>
@@ -8102,8 +9393,8 @@
         </p:nvSpPr>
         <p:spPr>
           <a:xfrm>
-            <a:off x="457200" y="777240"/>
-            <a:ext cx="11247120" cy="365760"/>
+            <a:off x="457200" y="2834640"/>
+            <a:ext cx="11247120" cy="1280160"/>
           </a:xfrm>
           <a:prstGeom prst="rect">
             <a:avLst/>
@@ -8116,7 +9407,7 @@
           </a:bodyPr>
           <a:lstStyle/>
           <a:p>
-            <a:pPr algn="l">
+            <a:pPr algn="ctr">
               <a:lnSpc>
                 <a:spcPct val="100000"/>
               </a:lnSpc>
@@ -8128,281 +9419,27 @@
               </a:spcAft>
             </a:pPr>
             <a:r>
-              <a:rPr sz="1600" b="0" i="1">
-                <a:solidFill>
-                  <a:srgbClr val="E0E8DB"/>
-                </a:solidFill>
-                <a:latin typeface="Open Sans"/>
-              </a:rPr>
-              <a:t>Testes + evidências no CI</a:t>
-            </a:r>
-          </a:p>
-        </p:txBody>
-      </p:sp>
-      <p:sp>
-        <p:nvSpPr>
-          <p:cNvPr id="5" name="Rounded Rectangle 4"/>
-          <p:cNvSpPr/>
-          <p:nvPr/>
-        </p:nvSpPr>
-        <p:spPr>
-          <a:xfrm>
-            <a:off x="411480" y="1463040"/>
-            <a:ext cx="11384280" cy="5029200"/>
-          </a:xfrm>
-          <a:prstGeom prst="roundRect">
-            <a:avLst/>
-          </a:prstGeom>
-          <a:solidFill>
-            <a:srgbClr val="F5F5F5"/>
-          </a:solidFill>
-          <a:ln w="15875">
-            <a:solidFill>
-              <a:srgbClr val="7CB342"/>
-            </a:solidFill>
-          </a:ln>
-          <a:effectLst/>
-        </p:spPr>
-        <p:style>
-          <a:lnRef idx="1">
-            <a:schemeClr val="accent1"/>
-          </a:lnRef>
-          <a:fillRef idx="3">
-            <a:schemeClr val="accent1"/>
-          </a:fillRef>
-          <a:effectRef idx="2">
-            <a:schemeClr val="accent1"/>
-          </a:effectRef>
-          <a:fontRef idx="minor">
-            <a:schemeClr val="lt1"/>
-          </a:fontRef>
-        </p:style>
-        <p:txBody>
-          <a:bodyPr rtlCol="0" anchor="ctr"/>
-          <a:lstStyle/>
-          <a:p>
-            <a:pPr algn="ctr"/>
-          </a:p>
-        </p:txBody>
-      </p:sp>
-      <p:sp>
-        <p:nvSpPr>
-          <p:cNvPr id="6" name="TextBox 5"/>
+              <a:rPr sz="6000" b="1" i="0">
+                <a:solidFill>
+                  <a:srgbClr val="FFFFFF"/>
+                </a:solidFill>
+                <a:latin typeface="Open Sans"/>
+              </a:rPr>
+              <a:t>No VidaPlus</a:t>
+            </a:r>
+          </a:p>
+        </p:txBody>
+      </p:sp>
+      <p:sp>
+        <p:nvSpPr>
+          <p:cNvPr id="5" name="TextBox 4"/>
           <p:cNvSpPr txBox="1"/>
           <p:nvPr/>
         </p:nvSpPr>
         <p:spPr>
           <a:xfrm>
-            <a:off x="868680" y="1783080"/>
-            <a:ext cx="10515600" cy="4572000"/>
-          </a:xfrm>
-          <a:prstGeom prst="rect">
-            <a:avLst/>
-          </a:prstGeom>
-          <a:noFill/>
-        </p:spPr>
-        <p:txBody>
-          <a:bodyPr wrap="square">
-            <a:spAutoFit/>
-          </a:bodyPr>
-          <a:lstStyle/>
-          <a:p>
-            <a:pPr algn="l">
-              <a:lnSpc>
-                <a:spcPct val="110000"/>
-              </a:lnSpc>
-              <a:spcAft>
-                <a:spcPts val="1400"/>
-              </a:spcAft>
-            </a:pPr>
-            <a:r>
-              <a:rPr sz="2000" b="1">
-                <a:solidFill>
-                  <a:srgbClr val="7CB342"/>
-                </a:solidFill>
-                <a:latin typeface="Open Sans"/>
-              </a:rPr>
-              <a:t>▸ </a:t>
-            </a:r>
-            <a:r>
-              <a:rPr sz="1800" b="1">
-                <a:solidFill>
-                  <a:srgbClr val="2D7A3D"/>
-                </a:solidFill>
-                <a:latin typeface="Open Sans"/>
-              </a:rPr>
-              <a:t>Teste do controle: </a:t>
-            </a:r>
-            <a:r>
-              <a:rPr sz="1800">
-                <a:solidFill>
-                  <a:srgbClr val="212121"/>
-                </a:solidFill>
-                <a:latin typeface="Open Sans"/>
-              </a:rPr>
-              <a:t>ex.: A pede exame de B -&gt; HTTP 403, nada vazado.</a:t>
-            </a:r>
-          </a:p>
-          <a:p>
-            <a:pPr algn="l">
-              <a:lnSpc>
-                <a:spcPct val="110000"/>
-              </a:lnSpc>
-              <a:spcAft>
-                <a:spcPts val="1400"/>
-              </a:spcAft>
-            </a:pPr>
-            <a:r>
-              <a:rPr sz="2000" b="1">
-                <a:solidFill>
-                  <a:srgbClr val="7CB342"/>
-                </a:solidFill>
-                <a:latin typeface="Open Sans"/>
-              </a:rPr>
-              <a:t>▸ </a:t>
-            </a:r>
-            <a:r>
-              <a:rPr sz="1800" b="1">
-                <a:solidFill>
-                  <a:srgbClr val="2D7A3D"/>
-                </a:solidFill>
-                <a:latin typeface="Open Sans"/>
-              </a:rPr>
-              <a:t>Scanners: </a:t>
-            </a:r>
-            <a:r>
-              <a:rPr sz="1800">
-                <a:solidFill>
-                  <a:srgbClr val="212121"/>
-                </a:solidFill>
-                <a:latin typeface="Open Sans"/>
-              </a:rPr>
-              <a:t>leia os relatórios de SAST/DAST/SCA do pipeline.</a:t>
-            </a:r>
-          </a:p>
-          <a:p>
-            <a:pPr algn="l">
-              <a:lnSpc>
-                <a:spcPct val="110000"/>
-              </a:lnSpc>
-              <a:spcAft>
-                <a:spcPts val="1400"/>
-              </a:spcAft>
-            </a:pPr>
-            <a:r>
-              <a:rPr sz="2000" b="1">
-                <a:solidFill>
-                  <a:srgbClr val="7CB342"/>
-                </a:solidFill>
-                <a:latin typeface="Open Sans"/>
-              </a:rPr>
-              <a:t>▸ </a:t>
-            </a:r>
-            <a:r>
-              <a:rPr sz="1800" b="1">
-                <a:solidFill>
-                  <a:srgbClr val="2D7A3D"/>
-                </a:solidFill>
-                <a:latin typeface="Open Sans"/>
-              </a:rPr>
-              <a:t>Gate bloqueante: </a:t>
-            </a:r>
-            <a:r>
-              <a:rPr sz="1800">
-                <a:solidFill>
-                  <a:srgbClr val="212121"/>
-                </a:solidFill>
-                <a:latin typeface="Open Sans"/>
-              </a:rPr>
-              <a:t>torne bloqueante o gate da classe corrigida.</a:t>
-            </a:r>
-          </a:p>
-          <a:p>
-            <a:pPr algn="l">
-              <a:lnSpc>
-                <a:spcPct val="110000"/>
-              </a:lnSpc>
-              <a:spcAft>
-                <a:spcPts val="1400"/>
-              </a:spcAft>
-            </a:pPr>
-            <a:r>
-              <a:rPr sz="2000" b="1">
-                <a:solidFill>
-                  <a:srgbClr val="7CB342"/>
-                </a:solidFill>
-                <a:latin typeface="Open Sans"/>
-              </a:rPr>
-              <a:t>▸ </a:t>
-            </a:r>
-            <a:r>
-              <a:rPr sz="1800" b="1">
-                <a:solidFill>
-                  <a:srgbClr val="2D7A3D"/>
-                </a:solidFill>
-                <a:latin typeface="Open Sans"/>
-              </a:rPr>
-              <a:t>Evidência real: </a:t>
-            </a:r>
-            <a:r>
-              <a:rPr sz="1800">
-                <a:solidFill>
-                  <a:srgbClr val="212121"/>
-                </a:solidFill>
-                <a:latin typeface="Open Sans"/>
-              </a:rPr>
-              <a:t>log do CI, print, relatório — anexe.</a:t>
-            </a:r>
-          </a:p>
-          <a:p>
-            <a:pPr algn="l">
-              <a:lnSpc>
-                <a:spcPct val="110000"/>
-              </a:lnSpc>
-              <a:spcAft>
-                <a:spcPts val="1400"/>
-              </a:spcAft>
-            </a:pPr>
-            <a:r>
-              <a:rPr sz="2000" b="1">
-                <a:solidFill>
-                  <a:srgbClr val="7CB342"/>
-                </a:solidFill>
-                <a:latin typeface="Open Sans"/>
-              </a:rPr>
-              <a:t>▸ </a:t>
-            </a:r>
-            <a:r>
-              <a:rPr sz="1800" b="1">
-                <a:solidFill>
-                  <a:srgbClr val="2D7A3D"/>
-                </a:solidFill>
-                <a:latin typeface="Open Sans"/>
-              </a:rPr>
-              <a:t>Regra de ouro: </a:t>
-            </a:r>
-            <a:r>
-              <a:rPr sz="1800">
-                <a:solidFill>
-                  <a:srgbClr val="212121"/>
-                </a:solidFill>
-                <a:latin typeface="Open Sans"/>
-              </a:rPr>
-              <a:t>requisito só está pronto com teste E evidência.</a:t>
-            </a:r>
-          </a:p>
-        </p:txBody>
-      </p:sp>
-      <p:sp>
-        <p:nvSpPr>
-          <p:cNvPr id="7" name="TextBox 6"/>
-          <p:cNvSpPr txBox="1"/>
-          <p:nvPr/>
-        </p:nvSpPr>
-        <p:spPr>
-          <a:xfrm>
-            <a:off x="10972800" y="6446520"/>
-            <a:ext cx="914400" cy="320040"/>
+            <a:off x="457200" y="4297680"/>
+            <a:ext cx="11247120" cy="457200"/>
           </a:xfrm>
           <a:prstGeom prst="rect">
             <a:avLst/>
@@ -8415,7 +9452,7 @@
           </a:bodyPr>
           <a:lstStyle/>
           <a:p>
-            <a:pPr algn="r">
+            <a:pPr algn="ctr">
               <a:lnSpc>
                 <a:spcPct val="100000"/>
               </a:lnSpc>
@@ -8427,14 +9464,58 @@
               </a:spcAft>
             </a:pPr>
             <a:r>
-              <a:rPr sz="1100" b="0" i="0">
-                <a:solidFill>
-                  <a:srgbClr val="616161"/>
-                </a:solidFill>
-                <a:latin typeface="Open Sans"/>
-              </a:rPr>
-              <a:t>8</a:t>
-            </a:r>
+              <a:rPr sz="2200" b="0" i="1">
+                <a:solidFill>
+                  <a:srgbClr val="CCD7C0"/>
+                </a:solidFill>
+                <a:latin typeface="Open Sans"/>
+              </a:rPr>
+              <a:t>A etapa desta semana (Fase 5)</a:t>
+            </a:r>
+          </a:p>
+        </p:txBody>
+      </p:sp>
+      <p:sp>
+        <p:nvSpPr>
+          <p:cNvPr id="6" name="Rectangle 5"/>
+          <p:cNvSpPr/>
+          <p:nvPr/>
+        </p:nvSpPr>
+        <p:spPr>
+          <a:xfrm>
+            <a:off x="5184648" y="4983480"/>
+            <a:ext cx="1828800" cy="25400"/>
+          </a:xfrm>
+          <a:prstGeom prst="rect">
+            <a:avLst/>
+          </a:prstGeom>
+          <a:solidFill>
+            <a:srgbClr val="7CB342"/>
+          </a:solidFill>
+          <a:ln>
+            <a:noFill/>
+          </a:ln>
+          <a:effectLst/>
+        </p:spPr>
+        <p:style>
+          <a:lnRef idx="1">
+            <a:schemeClr val="accent1"/>
+          </a:lnRef>
+          <a:fillRef idx="3">
+            <a:schemeClr val="accent1"/>
+          </a:fillRef>
+          <a:effectRef idx="2">
+            <a:schemeClr val="accent1"/>
+          </a:effectRef>
+          <a:fontRef idx="minor">
+            <a:schemeClr val="lt1"/>
+          </a:fontRef>
+        </p:style>
+        <p:txBody>
+          <a:bodyPr rtlCol="0" anchor="ctr"/>
+          <a:lstStyle/>
+          <a:p>
+            <a:pPr algn="ctr"/>
           </a:p>
         </p:txBody>
       </p:sp>
@@ -8465,13 +9546,13 @@
         <p:spPr>
           <a:xfrm>
             <a:off x="0" y="0"/>
-            <a:ext cx="12191695" cy="6858000"/>
+            <a:ext cx="12191695" cy="1234440"/>
           </a:xfrm>
           <a:prstGeom prst="rect">
             <a:avLst/>
           </a:prstGeom>
           <a:solidFill>
-            <a:srgbClr val="1F5232"/>
+            <a:srgbClr val="2D7A3D"/>
           </a:solidFill>
           <a:ln>
             <a:noFill/>
@@ -8500,40 +9581,16 @@
           </a:p>
         </p:txBody>
       </p:sp>
-      <p:pic>
-        <p:nvPicPr>
-          <p:cNvPr id="3" name="Picture 2" descr="logo_branco.png"/>
-          <p:cNvPicPr>
-            <a:picLocks noChangeAspect="1"/>
-          </p:cNvPicPr>
-          <p:nvPr/>
-        </p:nvPicPr>
-        <p:blipFill>
-          <a:blip r:embed="rId2"/>
-          <a:stretch>
-            <a:fillRect/>
-          </a:stretch>
-        </p:blipFill>
-        <p:spPr>
-          <a:xfrm>
-            <a:off x="4142232" y="548640"/>
-            <a:ext cx="3909060" cy="868680"/>
-          </a:xfrm>
-          <a:prstGeom prst="rect">
-            <a:avLst/>
-          </a:prstGeom>
-        </p:spPr>
-      </p:pic>
-      <p:sp>
-        <p:nvSpPr>
-          <p:cNvPr id="4" name="TextBox 3"/>
+      <p:sp>
+        <p:nvSpPr>
+          <p:cNvPr id="3" name="TextBox 2"/>
           <p:cNvSpPr txBox="1"/>
           <p:nvPr/>
         </p:nvSpPr>
         <p:spPr>
           <a:xfrm>
-            <a:off x="457200" y="2194560"/>
-            <a:ext cx="11247120" cy="1371600"/>
+            <a:off x="457200" y="164592"/>
+            <a:ext cx="11247120" cy="640080"/>
           </a:xfrm>
           <a:prstGeom prst="rect">
             <a:avLst/>
@@ -8546,7 +9603,7 @@
           </a:bodyPr>
           <a:lstStyle/>
           <a:p>
-            <a:pPr algn="ctr">
+            <a:pPr algn="l">
               <a:lnSpc>
                 <a:spcPct val="100000"/>
               </a:lnSpc>
@@ -8558,71 +9615,27 @@
               </a:spcAft>
             </a:pPr>
             <a:r>
-              <a:rPr sz="8800" b="1" i="0">
-                <a:solidFill>
-                  <a:srgbClr val="7CB342"/>
-                </a:solidFill>
-                <a:latin typeface="Open Sans"/>
-              </a:rPr>
-              <a:t>Perguntas?</a:t>
-            </a:r>
-          </a:p>
-        </p:txBody>
-      </p:sp>
-      <p:sp>
-        <p:nvSpPr>
-          <p:cNvPr id="5" name="Rectangle 4"/>
-          <p:cNvSpPr/>
-          <p:nvPr/>
-        </p:nvSpPr>
-        <p:spPr>
-          <a:xfrm>
-            <a:off x="5184648" y="3977639"/>
-            <a:ext cx="1828800" cy="25400"/>
-          </a:xfrm>
-          <a:prstGeom prst="rect">
-            <a:avLst/>
-          </a:prstGeom>
-          <a:solidFill>
-            <a:srgbClr val="7CB342"/>
-          </a:solidFill>
-          <a:ln>
-            <a:noFill/>
-          </a:ln>
-          <a:effectLst/>
-        </p:spPr>
-        <p:style>
-          <a:lnRef idx="1">
-            <a:schemeClr val="accent1"/>
-          </a:lnRef>
-          <a:fillRef idx="3">
-            <a:schemeClr val="accent1"/>
-          </a:fillRef>
-          <a:effectRef idx="2">
-            <a:schemeClr val="accent1"/>
-          </a:effectRef>
-          <a:fontRef idx="minor">
-            <a:schemeClr val="lt1"/>
-          </a:fontRef>
-        </p:style>
-        <p:txBody>
-          <a:bodyPr rtlCol="0" anchor="ctr"/>
-          <a:lstStyle/>
-          <a:p>
-            <a:pPr algn="ctr"/>
-          </a:p>
-        </p:txBody>
-      </p:sp>
-      <p:sp>
-        <p:nvSpPr>
-          <p:cNvPr id="6" name="TextBox 5"/>
+              <a:rPr sz="3200" b="1" i="0">
+                <a:solidFill>
+                  <a:srgbClr val="FFFFFF"/>
+                </a:solidFill>
+                <a:latin typeface="Open Sans"/>
+              </a:rPr>
+              <a:t>Entregável da Fase 5</a:t>
+            </a:r>
+          </a:p>
+        </p:txBody>
+      </p:sp>
+      <p:sp>
+        <p:nvSpPr>
+          <p:cNvPr id="4" name="TextBox 3"/>
           <p:cNvSpPr txBox="1"/>
           <p:nvPr/>
         </p:nvSpPr>
         <p:spPr>
           <a:xfrm>
-            <a:off x="457200" y="4297680"/>
-            <a:ext cx="11247120" cy="457200"/>
+            <a:off x="457200" y="777240"/>
+            <a:ext cx="11247120" cy="365760"/>
           </a:xfrm>
           <a:prstGeom prst="rect">
             <a:avLst/>
@@ -8635,7 +9648,7 @@
           </a:bodyPr>
           <a:lstStyle/>
           <a:p>
-            <a:pPr algn="ctr">
+            <a:pPr algn="l">
               <a:lnSpc>
                 <a:spcPct val="100000"/>
               </a:lnSpc>
@@ -8647,13 +9660,267 @@
               </a:spcAft>
             </a:pPr>
             <a:r>
-              <a:rPr sz="2200" b="1" i="0">
-                <a:solidFill>
-                  <a:srgbClr val="FFFFFF"/>
-                </a:solidFill>
-                <a:latin typeface="Open Sans"/>
-              </a:rPr>
-              <a:t>Prof. Dr. Alex Mulattieri Suarez Orozco</a:t>
+              <a:rPr sz="1600" b="0" i="1">
+                <a:solidFill>
+                  <a:srgbClr val="E0E8DB"/>
+                </a:solidFill>
+                <a:latin typeface="Open Sans"/>
+              </a:rPr>
+              <a:t>Testes + evidências no CI</a:t>
+            </a:r>
+          </a:p>
+        </p:txBody>
+      </p:sp>
+      <p:sp>
+        <p:nvSpPr>
+          <p:cNvPr id="5" name="Rounded Rectangle 4"/>
+          <p:cNvSpPr/>
+          <p:nvPr/>
+        </p:nvSpPr>
+        <p:spPr>
+          <a:xfrm>
+            <a:off x="411480" y="1463040"/>
+            <a:ext cx="11384280" cy="5029200"/>
+          </a:xfrm>
+          <a:prstGeom prst="roundRect">
+            <a:avLst/>
+          </a:prstGeom>
+          <a:solidFill>
+            <a:srgbClr val="F5F5F5"/>
+          </a:solidFill>
+          <a:ln w="15875">
+            <a:solidFill>
+              <a:srgbClr val="7CB342"/>
+            </a:solidFill>
+          </a:ln>
+          <a:effectLst/>
+        </p:spPr>
+        <p:style>
+          <a:lnRef idx="1">
+            <a:schemeClr val="accent1"/>
+          </a:lnRef>
+          <a:fillRef idx="3">
+            <a:schemeClr val="accent1"/>
+          </a:fillRef>
+          <a:effectRef idx="2">
+            <a:schemeClr val="accent1"/>
+          </a:effectRef>
+          <a:fontRef idx="minor">
+            <a:schemeClr val="lt1"/>
+          </a:fontRef>
+        </p:style>
+        <p:txBody>
+          <a:bodyPr rtlCol="0" anchor="ctr"/>
+          <a:lstStyle/>
+          <a:p>
+            <a:pPr algn="ctr"/>
+          </a:p>
+        </p:txBody>
+      </p:sp>
+      <p:sp>
+        <p:nvSpPr>
+          <p:cNvPr id="6" name="TextBox 5"/>
+          <p:cNvSpPr txBox="1"/>
+          <p:nvPr/>
+        </p:nvSpPr>
+        <p:spPr>
+          <a:xfrm>
+            <a:off x="868680" y="1783080"/>
+            <a:ext cx="10515600" cy="4572000"/>
+          </a:xfrm>
+          <a:prstGeom prst="rect">
+            <a:avLst/>
+          </a:prstGeom>
+          <a:noFill/>
+        </p:spPr>
+        <p:txBody>
+          <a:bodyPr wrap="square">
+            <a:spAutoFit/>
+          </a:bodyPr>
+          <a:lstStyle/>
+          <a:p>
+            <a:pPr algn="l">
+              <a:lnSpc>
+                <a:spcPct val="110000"/>
+              </a:lnSpc>
+              <a:spcAft>
+                <a:spcPts val="1400"/>
+              </a:spcAft>
+            </a:pPr>
+            <a:r>
+              <a:rPr sz="2000" b="1">
+                <a:solidFill>
+                  <a:srgbClr val="7CB342"/>
+                </a:solidFill>
+                <a:latin typeface="Open Sans"/>
+              </a:rPr>
+              <a:t>▸ </a:t>
+            </a:r>
+            <a:r>
+              <a:rPr sz="1800" b="1">
+                <a:solidFill>
+                  <a:srgbClr val="2D7A3D"/>
+                </a:solidFill>
+                <a:latin typeface="Open Sans"/>
+              </a:rPr>
+              <a:t>Teste do controle: </a:t>
+            </a:r>
+            <a:r>
+              <a:rPr sz="1800">
+                <a:solidFill>
+                  <a:srgbClr val="212121"/>
+                </a:solidFill>
+                <a:latin typeface="Open Sans"/>
+              </a:rPr>
+              <a:t>ex.: A pede exame de B -&gt; HTTP 403, nada vazado.</a:t>
+            </a:r>
+          </a:p>
+          <a:p>
+            <a:pPr algn="l">
+              <a:lnSpc>
+                <a:spcPct val="110000"/>
+              </a:lnSpc>
+              <a:spcAft>
+                <a:spcPts val="1400"/>
+              </a:spcAft>
+            </a:pPr>
+            <a:r>
+              <a:rPr sz="2000" b="1">
+                <a:solidFill>
+                  <a:srgbClr val="7CB342"/>
+                </a:solidFill>
+                <a:latin typeface="Open Sans"/>
+              </a:rPr>
+              <a:t>▸ </a:t>
+            </a:r>
+            <a:r>
+              <a:rPr sz="1800" b="1">
+                <a:solidFill>
+                  <a:srgbClr val="2D7A3D"/>
+                </a:solidFill>
+                <a:latin typeface="Open Sans"/>
+              </a:rPr>
+              <a:t>Scanners: </a:t>
+            </a:r>
+            <a:r>
+              <a:rPr sz="1800">
+                <a:solidFill>
+                  <a:srgbClr val="212121"/>
+                </a:solidFill>
+                <a:latin typeface="Open Sans"/>
+              </a:rPr>
+              <a:t>leia e interprete os relatórios de SAST/DAST/SCA do pipeline.</a:t>
+            </a:r>
+          </a:p>
+          <a:p>
+            <a:pPr algn="l">
+              <a:lnSpc>
+                <a:spcPct val="110000"/>
+              </a:lnSpc>
+              <a:spcAft>
+                <a:spcPts val="1400"/>
+              </a:spcAft>
+            </a:pPr>
+            <a:r>
+              <a:rPr sz="2000" b="1">
+                <a:solidFill>
+                  <a:srgbClr val="7CB342"/>
+                </a:solidFill>
+                <a:latin typeface="Open Sans"/>
+              </a:rPr>
+              <a:t>▸ </a:t>
+            </a:r>
+            <a:r>
+              <a:rPr sz="1800" b="1">
+                <a:solidFill>
+                  <a:srgbClr val="2D7A3D"/>
+                </a:solidFill>
+                <a:latin typeface="Open Sans"/>
+              </a:rPr>
+              <a:t>Gate bloqueante: </a:t>
+            </a:r>
+            <a:r>
+              <a:rPr sz="1800">
+                <a:solidFill>
+                  <a:srgbClr val="212121"/>
+                </a:solidFill>
+                <a:latin typeface="Open Sans"/>
+              </a:rPr>
+              <a:t>torne bloqueante o gate da classe corrigida.</a:t>
+            </a:r>
+          </a:p>
+          <a:p>
+            <a:pPr algn="l">
+              <a:lnSpc>
+                <a:spcPct val="110000"/>
+              </a:lnSpc>
+              <a:spcAft>
+                <a:spcPts val="1400"/>
+              </a:spcAft>
+            </a:pPr>
+            <a:r>
+              <a:rPr sz="2000" b="1">
+                <a:solidFill>
+                  <a:srgbClr val="7CB342"/>
+                </a:solidFill>
+                <a:latin typeface="Open Sans"/>
+              </a:rPr>
+              <a:t>▸ </a:t>
+            </a:r>
+            <a:r>
+              <a:rPr sz="1800" b="1">
+                <a:solidFill>
+                  <a:srgbClr val="2D7A3D"/>
+                </a:solidFill>
+                <a:latin typeface="Open Sans"/>
+              </a:rPr>
+              <a:t>Evidência real: </a:t>
+            </a:r>
+            <a:r>
+              <a:rPr sz="1800">
+                <a:solidFill>
+                  <a:srgbClr val="212121"/>
+                </a:solidFill>
+                <a:latin typeface="Open Sans"/>
+              </a:rPr>
+              <a:t>log do CI, print, relatório — anexe ao dossiê.</a:t>
+            </a:r>
+          </a:p>
+          <a:p>
+            <a:pPr algn="l">
+              <a:lnSpc>
+                <a:spcPct val="110000"/>
+              </a:lnSpc>
+              <a:spcAft>
+                <a:spcPts val="1400"/>
+              </a:spcAft>
+            </a:pPr>
+            <a:r>
+              <a:rPr sz="2000" b="1">
+                <a:solidFill>
+                  <a:srgbClr val="7CB342"/>
+                </a:solidFill>
+                <a:latin typeface="Open Sans"/>
+              </a:rPr>
+              <a:t>▸ </a:t>
+            </a:r>
+            <a:r>
+              <a:rPr sz="1800" b="1">
+                <a:solidFill>
+                  <a:srgbClr val="2D7A3D"/>
+                </a:solidFill>
+                <a:latin typeface="Open Sans"/>
+              </a:rPr>
+              <a:t>Regra de ouro: </a:t>
+            </a:r>
+            <a:r>
+              <a:rPr sz="1800">
+                <a:solidFill>
+                  <a:srgbClr val="212121"/>
+                </a:solidFill>
+                <a:latin typeface="Open Sans"/>
+              </a:rPr>
+              <a:t>requisito só está pronto com teste E evidência.</a:t>
             </a:r>
           </a:p>
         </p:txBody>
@@ -8666,8 +9933,8 @@
         </p:nvSpPr>
         <p:spPr>
           <a:xfrm>
-            <a:off x="457200" y="4800600"/>
-            <a:ext cx="11247120" cy="457200"/>
+            <a:off x="10972800" y="6446520"/>
+            <a:ext cx="914400" cy="320040"/>
           </a:xfrm>
           <a:prstGeom prst="rect">
             <a:avLst/>
@@ -8680,7 +9947,7 @@
           </a:bodyPr>
           <a:lstStyle/>
           <a:p>
-            <a:pPr algn="ctr">
+            <a:pPr algn="r">
               <a:lnSpc>
                 <a:spcPct val="100000"/>
               </a:lnSpc>
@@ -8692,58 +9959,13 @@
               </a:spcAft>
             </a:pPr>
             <a:r>
-              <a:rPr sz="1800" b="0" i="1">
-                <a:solidFill>
-                  <a:srgbClr val="CCD7C0"/>
-                </a:solidFill>
-                <a:latin typeface="Open Sans"/>
-              </a:rPr>
-              <a:t>alexorozco@ifsul.edu.br</a:t>
-            </a:r>
-          </a:p>
-        </p:txBody>
-      </p:sp>
-      <p:sp>
-        <p:nvSpPr>
-          <p:cNvPr id="8" name="TextBox 7"/>
-          <p:cNvSpPr txBox="1"/>
-          <p:nvPr/>
-        </p:nvSpPr>
-        <p:spPr>
-          <a:xfrm>
-            <a:off x="457200" y="5943600"/>
-            <a:ext cx="11247120" cy="457200"/>
-          </a:xfrm>
-          <a:prstGeom prst="rect">
-            <a:avLst/>
-          </a:prstGeom>
-          <a:noFill/>
-        </p:spPr>
-        <p:txBody>
-          <a:bodyPr wrap="square" anchor="t" lIns="0" rIns="0" tIns="0" bIns="0">
-            <a:spAutoFit/>
-          </a:bodyPr>
-          <a:lstStyle/>
-          <a:p>
-            <a:pPr algn="ctr">
-              <a:lnSpc>
-                <a:spcPct val="100000"/>
-              </a:lnSpc>
-              <a:spcBef>
-                <a:spcPts val="0"/>
-              </a:spcBef>
-              <a:spcAft>
-                <a:spcPts val="600"/>
-              </a:spcAft>
-            </a:pPr>
-            <a:r>
-              <a:rPr sz="1400" b="0" i="0">
-                <a:solidFill>
-                  <a:srgbClr val="CCD7C0"/>
-                </a:solidFill>
-                <a:latin typeface="Open Sans"/>
-              </a:rPr>
-              <a:t>IFSul · Câmpus Sapucaia do Sul</a:t>
+              <a:rPr sz="1100" b="0" i="0">
+                <a:solidFill>
+                  <a:srgbClr val="616161"/>
+                </a:solidFill>
+                <a:latin typeface="Open Sans"/>
+              </a:rPr>
+              <a:t>9</a:t>
             </a:r>
           </a:p>
         </p:txBody>
@@ -9074,4 +10296,324 @@
   </a:objectDefaults>
   <a:extraClrSchemeLst/>
 </a:theme>
+</file>
+
+<file path=ppt/theme/theme2.xml><?xml version="1.0" encoding="utf-8"?>
+<a:theme xmlns:a="http://schemas.openxmlformats.org/drawingml/2006/main" name="Office Theme">
+  <a:themeElements>
+    <a:clrScheme name="Office">
+      <a:dk1>
+        <a:sysClr val="windowText" lastClr="000000"/>
+      </a:dk1>
+      <a:lt1>
+        <a:sysClr val="window" lastClr="FFFFFF"/>
+      </a:lt1>
+      <a:dk2>
+        <a:srgbClr val="1F497D"/>
+      </a:dk2>
+      <a:lt2>
+        <a:srgbClr val="EEECE1"/>
+      </a:lt2>
+      <a:accent1>
+        <a:srgbClr val="4F81BD"/>
+      </a:accent1>
+      <a:accent2>
+        <a:srgbClr val="C0504D"/>
+      </a:accent2>
+      <a:accent3>
+        <a:srgbClr val="9BBB59"/>
+      </a:accent3>
+      <a:accent4>
+        <a:srgbClr val="8064A2"/>
+      </a:accent4>
+      <a:accent5>
+        <a:srgbClr val="4BACC6"/>
+      </a:accent5>
+      <a:accent6>
+        <a:srgbClr val="F79646"/>
+      </a:accent6>
+      <a:hlink>
+        <a:srgbClr val="0000FF"/>
+      </a:hlink>
+      <a:folHlink>
+        <a:srgbClr val="800080"/>
+      </a:folHlink>
+    </a:clrScheme>
+    <a:fontScheme name="Office">
+      <a:majorFont>
+        <a:latin typeface="Calibri"/>
+        <a:ea typeface=""/>
+        <a:cs typeface=""/>
+        <a:font script="Jpan" typeface="ＭＳ Ｐゴシック"/>
+        <a:font script="Hang" typeface="맑은 고딕"/>
+        <a:font script="Hans" typeface="宋体"/>
+        <a:font script="Hant" typeface="新細明體"/>
+        <a:font script="Arab" typeface="Times New Roman"/>
+        <a:font script="Hebr" typeface="Times New Roman"/>
+        <a:font script="Thai" typeface="Angsana New"/>
+        <a:font script="Ethi" typeface="Nyala"/>
+        <a:font script="Beng" typeface="Vrinda"/>
+        <a:font script="Gujr" typeface="Shruti"/>
+        <a:font script="Khmr" typeface="MoolBoran"/>
+        <a:font script="Knda" typeface="Tunga"/>
+        <a:font script="Guru" typeface="Raavi"/>
+        <a:font script="Cans" typeface="Euphemia"/>
+        <a:font script="Cher" typeface="Plantagenet Cherokee"/>
+        <a:font script="Yiii" typeface="Microsoft Yi Baiti"/>
+        <a:font script="Tibt" typeface="Microsoft Himalaya"/>
+        <a:font script="Thaa" typeface="MV Boli"/>
+        <a:font script="Deva" typeface="Mangal"/>
+        <a:font script="Telu" typeface="Gautami"/>
+        <a:font script="Taml" typeface="Latha"/>
+        <a:font script="Syrc" typeface="Estrangelo Edessa"/>
+        <a:font script="Orya" typeface="Kalinga"/>
+        <a:font script="Mlym" typeface="Kartika"/>
+        <a:font script="Laoo" typeface="DokChampa"/>
+        <a:font script="Sinh" typeface="Iskoola Pota"/>
+        <a:font script="Mong" typeface="Mongolian Baiti"/>
+        <a:font script="Viet" typeface="Times New Roman"/>
+        <a:font script="Uigh" typeface="Microsoft Uighur"/>
+        <a:font script="Geor" typeface="Sylfaen"/>
+      </a:majorFont>
+      <a:minorFont>
+        <a:latin typeface="Calibri"/>
+        <a:ea typeface=""/>
+        <a:cs typeface=""/>
+        <a:font script="Jpan" typeface="ＭＳ Ｐゴシック"/>
+        <a:font script="Hang" typeface="맑은 고딕"/>
+        <a:font script="Hans" typeface="宋体"/>
+        <a:font script="Hant" typeface="新細明體"/>
+        <a:font script="Arab" typeface="Arial"/>
+        <a:font script="Hebr" typeface="Arial"/>
+        <a:font script="Thai" typeface="Cordia New"/>
+        <a:font script="Ethi" typeface="Nyala"/>
+        <a:font script="Beng" typeface="Vrinda"/>
+        <a:font script="Gujr" typeface="Shruti"/>
+        <a:font script="Khmr" typeface="DaunPenh"/>
+        <a:font script="Knda" typeface="Tunga"/>
+        <a:font script="Guru" typeface="Raavi"/>
+        <a:font script="Cans" typeface="Euphemia"/>
+        <a:font script="Cher" typeface="Plantagenet Cherokee"/>
+        <a:font script="Yiii" typeface="Microsoft Yi Baiti"/>
+        <a:font script="Tibt" typeface="Microsoft Himalaya"/>
+        <a:font script="Thaa" typeface="MV Boli"/>
+        <a:font script="Deva" typeface="Mangal"/>
+        <a:font script="Telu" typeface="Gautami"/>
+        <a:font script="Taml" typeface="Latha"/>
+        <a:font script="Syrc" typeface="Estrangelo Edessa"/>
+        <a:font script="Orya" typeface="Kalinga"/>
+        <a:font script="Mlym" typeface="Kartika"/>
+        <a:font script="Laoo" typeface="DokChampa"/>
+        <a:font script="Sinh" typeface="Iskoola Pota"/>
+        <a:font script="Mong" typeface="Mongolian Baiti"/>
+        <a:font script="Viet" typeface="Arial"/>
+        <a:font script="Uigh" typeface="Microsoft Uighur"/>
+        <a:font script="Geor" typeface="Sylfaen"/>
+      </a:minorFont>
+    </a:fontScheme>
+    <a:fmtScheme name="Office">
+      <a:fillStyleLst>
+        <a:solidFill>
+          <a:schemeClr val="phClr"/>
+        </a:solidFill>
+        <a:gradFill rotWithShape="1">
+          <a:gsLst>
+            <a:gs pos="0">
+              <a:schemeClr val="phClr">
+                <a:tint val="50000"/>
+                <a:satMod val="300000"/>
+              </a:schemeClr>
+            </a:gs>
+            <a:gs pos="35000">
+              <a:schemeClr val="phClr">
+                <a:tint val="37000"/>
+                <a:satMod val="300000"/>
+              </a:schemeClr>
+            </a:gs>
+            <a:gs pos="100000">
+              <a:schemeClr val="phClr">
+                <a:tint val="15000"/>
+                <a:satMod val="350000"/>
+              </a:schemeClr>
+            </a:gs>
+          </a:gsLst>
+          <a:lin ang="16200000" scaled="1"/>
+        </a:gradFill>
+        <a:gradFill rotWithShape="1">
+          <a:gsLst>
+            <a:gs pos="0">
+              <a:schemeClr val="phClr">
+                <a:tint val="100000"/>
+                <a:shade val="100000"/>
+                <a:satMod val="130000"/>
+              </a:schemeClr>
+            </a:gs>
+            <a:gs pos="100000">
+              <a:schemeClr val="phClr">
+                <a:tint val="50000"/>
+                <a:shade val="100000"/>
+                <a:satMod val="350000"/>
+              </a:schemeClr>
+            </a:gs>
+          </a:gsLst>
+          <a:lin ang="16200000" scaled="0"/>
+        </a:gradFill>
+      </a:fillStyleLst>
+      <a:lnStyleLst>
+        <a:ln w="9525" cap="flat" cmpd="sng" algn="ctr">
+          <a:solidFill>
+            <a:schemeClr val="phClr">
+              <a:shade val="95000"/>
+              <a:satMod val="105000"/>
+            </a:schemeClr>
+          </a:solidFill>
+          <a:prstDash val="solid"/>
+        </a:ln>
+        <a:ln w="25400" cap="flat" cmpd="sng" algn="ctr">
+          <a:solidFill>
+            <a:schemeClr val="phClr"/>
+          </a:solidFill>
+          <a:prstDash val="solid"/>
+        </a:ln>
+        <a:ln w="38100" cap="flat" cmpd="sng" algn="ctr">
+          <a:solidFill>
+            <a:schemeClr val="phClr"/>
+          </a:solidFill>
+          <a:prstDash val="solid"/>
+        </a:ln>
+      </a:lnStyleLst>
+      <a:effectStyleLst>
+        <a:effectStyle>
+          <a:effectLst>
+            <a:outerShdw blurRad="40000" dist="20000" dir="5400000" rotWithShape="0">
+              <a:srgbClr val="000000">
+                <a:alpha val="38000"/>
+              </a:srgbClr>
+            </a:outerShdw>
+          </a:effectLst>
+        </a:effectStyle>
+        <a:effectStyle>
+          <a:effectLst>
+            <a:outerShdw blurRad="40000" dist="23000" dir="5400000" rotWithShape="0">
+              <a:srgbClr val="000000">
+                <a:alpha val="35000"/>
+              </a:srgbClr>
+            </a:outerShdw>
+          </a:effectLst>
+        </a:effectStyle>
+        <a:effectStyle>
+          <a:effectLst>
+            <a:outerShdw blurRad="40000" dist="23000" dir="5400000" rotWithShape="0">
+              <a:srgbClr val="000000">
+                <a:alpha val="35000"/>
+              </a:srgbClr>
+            </a:outerShdw>
+          </a:effectLst>
+          <a:scene3d>
+            <a:camera prst="orthographicFront">
+              <a:rot lat="0" lon="0" rev="0"/>
+            </a:camera>
+            <a:lightRig rig="threePt" dir="t">
+              <a:rot lat="0" lon="0" rev="1200000"/>
+            </a:lightRig>
+          </a:scene3d>
+          <a:sp3d>
+            <a:bevelT w="63500" h="25400"/>
+          </a:sp3d>
+        </a:effectStyle>
+      </a:effectStyleLst>
+      <a:bgFillStyleLst>
+        <a:solidFill>
+          <a:schemeClr val="phClr"/>
+        </a:solidFill>
+        <a:gradFill rotWithShape="1">
+          <a:gsLst>
+            <a:gs pos="0">
+              <a:schemeClr val="phClr">
+                <a:tint val="40000"/>
+                <a:satMod val="350000"/>
+              </a:schemeClr>
+            </a:gs>
+            <a:gs pos="40000">
+              <a:schemeClr val="phClr">
+                <a:tint val="45000"/>
+                <a:shade val="99000"/>
+                <a:satMod val="350000"/>
+              </a:schemeClr>
+            </a:gs>
+            <a:gs pos="100000">
+              <a:schemeClr val="phClr">
+                <a:shade val="20000"/>
+                <a:satMod val="255000"/>
+              </a:schemeClr>
+            </a:gs>
+          </a:gsLst>
+          <a:path path="circle">
+            <a:fillToRect l="50000" t="-80000" r="50000" b="180000"/>
+          </a:path>
+        </a:gradFill>
+        <a:gradFill rotWithShape="1">
+          <a:gsLst>
+            <a:gs pos="0">
+              <a:schemeClr val="phClr">
+                <a:tint val="80000"/>
+                <a:satMod val="300000"/>
+              </a:schemeClr>
+            </a:gs>
+            <a:gs pos="100000">
+              <a:schemeClr val="phClr">
+                <a:shade val="30000"/>
+                <a:satMod val="200000"/>
+              </a:schemeClr>
+            </a:gs>
+          </a:gsLst>
+          <a:path path="circle">
+            <a:fillToRect l="50000" t="50000" r="50000" b="50000"/>
+          </a:path>
+        </a:gradFill>
+      </a:bgFillStyleLst>
+    </a:fmtScheme>
+  </a:themeElements>
+  <a:objectDefaults>
+    <a:spDef>
+      <a:spPr/>
+      <a:bodyPr/>
+      <a:lstStyle/>
+      <a:style>
+        <a:lnRef idx="1">
+          <a:schemeClr val="accent1"/>
+        </a:lnRef>
+        <a:fillRef idx="3">
+          <a:schemeClr val="accent1"/>
+        </a:fillRef>
+        <a:effectRef idx="2">
+          <a:schemeClr val="accent1"/>
+        </a:effectRef>
+        <a:fontRef idx="minor">
+          <a:schemeClr val="lt1"/>
+        </a:fontRef>
+      </a:style>
+    </a:spDef>
+    <a:lnDef>
+      <a:spPr/>
+      <a:bodyPr/>
+      <a:lstStyle/>
+      <a:style>
+        <a:lnRef idx="2">
+          <a:schemeClr val="accent1"/>
+        </a:lnRef>
+        <a:fillRef idx="0">
+          <a:schemeClr val="accent1"/>
+        </a:fillRef>
+        <a:effectRef idx="1">
+          <a:schemeClr val="accent1"/>
+        </a:effectRef>
+        <a:fontRef idx="minor">
+          <a:schemeClr val="tx1"/>
+        </a:fontRef>
+      </a:style>
+    </a:lnDef>
+  </a:objectDefaults>
+  <a:extraClrSchemeLst/>
+</a:theme>
 </file>
--- a/aulas/aula-07-verificacao.pptx
+++ b/aulas/aula-07-verificacao.pptx
@@ -9666,7 +9666,7 @@
                 </a:solidFill>
                 <a:latin typeface="Open Sans"/>
               </a:rPr>
-              <a:t>Testes + evidências no CI</a:t>
+              <a:t>Testes de segurança + evidências (dossiê §7)</a:t>
             </a:r>
           </a:p>
         </p:txBody>
@@ -9763,7 +9763,7 @@
                 </a:solidFill>
                 <a:latin typeface="Open Sans"/>
               </a:rPr>
-              <a:t>Teste do controle: </a:t>
+              <a:t>Entregar: </a:t>
             </a:r>
             <a:r>
               <a:rPr sz="1800">
@@ -9772,7 +9772,7 @@
                 </a:solidFill>
                 <a:latin typeface="Open Sans"/>
               </a:rPr>
-              <a:t>ex.: A pede exame de B -&gt; HTTP 403, nada vazado.</a:t>
+              <a:t>o teste que exercita seu controle (ex.: A pede exame de B -&gt; 403, nada vazado).</a:t>
             </a:r>
           </a:p>
           <a:p>
@@ -9809,7 +9809,7 @@
                 </a:solidFill>
                 <a:latin typeface="Open Sans"/>
               </a:rPr>
-              <a:t>leia e interprete os relatórios de SAST/DAST/SCA do pipeline.</a:t>
+              <a:t>leia e interprete os relatórios SAST/DAST/SCA do pipeline.</a:t>
             </a:r>
           </a:p>
           <a:p>
@@ -9874,7 +9874,7 @@
                 </a:solidFill>
                 <a:latin typeface="Open Sans"/>
               </a:rPr>
-              <a:t>Evidência real: </a:t>
+              <a:t>Evidência: </a:t>
             </a:r>
             <a:r>
               <a:rPr sz="1800">
@@ -9883,7 +9883,7 @@
                 </a:solidFill>
                 <a:latin typeface="Open Sans"/>
               </a:rPr>
-              <a:t>log do CI, print, relatório — anexe ao dossiê.</a:t>
+              <a:t>anexe log do CI / print / relatório ao dossiê.</a:t>
             </a:r>
           </a:p>
           <a:p>
@@ -9911,7 +9911,7 @@
                 </a:solidFill>
                 <a:latin typeface="Open Sans"/>
               </a:rPr>
-              <a:t>Regra de ouro: </a:t>
+              <a:t>Pronto quando: </a:t>
             </a:r>
             <a:r>
               <a:rPr sz="1800">
@@ -9920,7 +9920,7 @@
                 </a:solidFill>
                 <a:latin typeface="Open Sans"/>
               </a:rPr>
-              <a:t>requisito só está pronto com teste E evidência.</a:t>
+              <a:t>requisito = teste + evidência (linha sem teste = não verificado).</a:t>
             </a:r>
           </a:p>
         </p:txBody>

--- a/aulas/aula-07-verificacao.pptx
+++ b/aulas/aula-07-verificacao.pptx
@@ -4154,7 +4154,7 @@
                 </a:solidFill>
                 <a:latin typeface="Open Sans"/>
               </a:rPr>
-              <a:t>TADS · Segurança em Sistemas Computacionais</a:t>
+              <a:t>TADS · Segurança de Sistemas Computacionais</a:t>
             </a:r>
           </a:p>
         </p:txBody>

--- a/aulas/aula-07-verificacao.pptx
+++ b/aulas/aula-07-verificacao.pptx
@@ -9772,7 +9772,7 @@
                 </a:solidFill>
                 <a:latin typeface="Open Sans"/>
               </a:rPr>
-              <a:t>o teste que exercita seu controle (ex.: A pede exame de B -&gt; 403, nada vazado).</a:t>
+              <a:t>o teste do seu P0 (já vem pronto): vermelho antes, verde depois.</a:t>
             </a:r>
           </a:p>
           <a:p>
@@ -9837,7 +9837,7 @@
                 </a:solidFill>
                 <a:latin typeface="Open Sans"/>
               </a:rPr>
-              <a:t>Gate bloqueante: </a:t>
+              <a:t>Gates: </a:t>
             </a:r>
             <a:r>
               <a:rPr sz="1800">
@@ -9846,7 +9846,7 @@
                 </a:solidFill>
                 <a:latin typeface="Open Sans"/>
               </a:rPr>
-              <a:t>torne bloqueante o gate da classe corrigida.</a:t>
+              <a:t>ficam informativos; ache o seu teste no log do CI.</a:t>
             </a:r>
           </a:p>
           <a:p>
